--- a/day4/Day4_MiniZinc_Slides .pptx
+++ b/day4/Day4_MiniZinc_Slides .pptx
@@ -9164,45 +9164,6 @@
       </p:sp>
       <p:sp>
         <p:nvSpPr>
-          <p:cNvPr id="12" name="Text 10"/>
-          <p:cNvSpPr/>
-          <p:nvPr/>
-        </p:nvSpPr>
-        <p:spPr>
-          <a:xfrm>
-            <a:off x="3749040" y="2395728"/>
-            <a:ext cx="4937760" cy="411480"/>
-          </a:xfrm>
-          <a:prstGeom prst="rect">
-            <a:avLst/>
-          </a:prstGeom>
-          <a:noFill/>
-          <a:ln/>
-        </p:spPr>
-        <p:txBody>
-          <a:bodyPr wrap="square" rtlCol="0" anchor="ctr"/>
-          <a:lstStyle/>
-          <a:p>
-            <a:pPr marL="0" indent="0">
-              <a:buNone/>
-            </a:pPr>
-            <a:r>
-              <a:rPr lang="en-US" sz="1050" dirty="0">
-                <a:solidFill>
-                  <a:srgbClr val="2D3748"/>
-                </a:solidFill>
-                <a:latin typeface="Consolas" pitchFamily="34" charset="0"/>
-                <a:ea typeface="Consolas" pitchFamily="34" charset="-122"/>
-                <a:cs typeface="Consolas" pitchFamily="34" charset="-120"/>
-              </a:rPr>
-              <a:t>forall(d)(sum(e)(roster[e,d]=M) &gt;= req_M /\ ...)</a:t>
-            </a:r>
-            <a:endParaRPr lang="en-US" sz="1050" dirty="0"/>
-          </a:p>
-        </p:txBody>
-      </p:sp>
-      <p:sp>
-        <p:nvSpPr>
           <p:cNvPr id="13" name="Shape 11"/>
           <p:cNvSpPr/>
           <p:nvPr/>
@@ -9335,45 +9296,6 @@
       </p:sp>
       <p:sp>
         <p:nvSpPr>
-          <p:cNvPr id="17" name="Text 15"/>
-          <p:cNvSpPr/>
-          <p:nvPr/>
-        </p:nvSpPr>
-        <p:spPr>
-          <a:xfrm>
-            <a:off x="3749040" y="2862072"/>
-            <a:ext cx="4937760" cy="411480"/>
-          </a:xfrm>
-          <a:prstGeom prst="rect">
-            <a:avLst/>
-          </a:prstGeom>
-          <a:noFill/>
-          <a:ln/>
-        </p:spPr>
-        <p:txBody>
-          <a:bodyPr wrap="square" rtlCol="0" anchor="ctr"/>
-          <a:lstStyle/>
-          <a:p>
-            <a:pPr marL="0" indent="0">
-              <a:buNone/>
-            </a:pPr>
-            <a:r>
-              <a:rPr lang="en-US" sz="1050" dirty="0">
-                <a:solidFill>
-                  <a:srgbClr val="2D3748"/>
-                </a:solidFill>
-                <a:latin typeface="Consolas" pitchFamily="34" charset="0"/>
-                <a:ea typeface="Consolas" pitchFamily="34" charset="-122"/>
-                <a:cs typeface="Consolas" pitchFamily="34" charset="-120"/>
-              </a:rPr>
-              <a:t>roster[e,d]=N -&gt; roster[e,d+1]=O  (ทุก e, d &lt; 14)</a:t>
-            </a:r>
-            <a:endParaRPr lang="en-US" sz="1050" dirty="0"/>
-          </a:p>
-        </p:txBody>
-      </p:sp>
-      <p:sp>
-        <p:nvSpPr>
           <p:cNvPr id="18" name="Shape 16"/>
           <p:cNvSpPr/>
           <p:nvPr/>
@@ -9506,45 +9428,6 @@
       </p:sp>
       <p:sp>
         <p:nvSpPr>
-          <p:cNvPr id="22" name="Text 20"/>
-          <p:cNvSpPr/>
-          <p:nvPr/>
-        </p:nvSpPr>
-        <p:spPr>
-          <a:xfrm>
-            <a:off x="3749040" y="3328416"/>
-            <a:ext cx="4937760" cy="411480"/>
-          </a:xfrm>
-          <a:prstGeom prst="rect">
-            <a:avLst/>
-          </a:prstGeom>
-          <a:noFill/>
-          <a:ln/>
-        </p:spPr>
-        <p:txBody>
-          <a:bodyPr wrap="square" rtlCol="0" anchor="ctr"/>
-          <a:lstStyle/>
-          <a:p>
-            <a:pPr marL="0" indent="0">
-              <a:buNone/>
-            </a:pPr>
-            <a:r>
-              <a:rPr lang="en-US" sz="1050" dirty="0">
-                <a:solidFill>
-                  <a:srgbClr val="2D3748"/>
-                </a:solidFill>
-                <a:latin typeface="Consolas" pitchFamily="34" charset="0"/>
-                <a:ea typeface="Consolas" pitchFamily="34" charset="-122"/>
-                <a:cs typeface="Consolas" pitchFamily="34" charset="-120"/>
-              </a:rPr>
-              <a:t>forall(e,d0)(sum(d in d0..d0+6)(roster[e,d]!=O) &lt;= 6)</a:t>
-            </a:r>
-            <a:endParaRPr lang="en-US" sz="1050" dirty="0"/>
-          </a:p>
-        </p:txBody>
-      </p:sp>
-      <p:sp>
-        <p:nvSpPr>
           <p:cNvPr id="23" name="Shape 21"/>
           <p:cNvSpPr/>
           <p:nvPr/>
@@ -9672,45 +9555,6 @@
               <a:t>solve minimize total_nights: </a:t>
             </a:r>
             <a:endParaRPr lang="en-US" sz="1150" dirty="0"/>
-          </a:p>
-        </p:txBody>
-      </p:sp>
-      <p:sp>
-        <p:nvSpPr>
-          <p:cNvPr id="27" name="Text 25"/>
-          <p:cNvSpPr/>
-          <p:nvPr/>
-        </p:nvSpPr>
-        <p:spPr>
-          <a:xfrm>
-            <a:off x="3749040" y="3794760"/>
-            <a:ext cx="4937760" cy="411480"/>
-          </a:xfrm>
-          <a:prstGeom prst="rect">
-            <a:avLst/>
-          </a:prstGeom>
-          <a:noFill/>
-          <a:ln/>
-        </p:spPr>
-        <p:txBody>
-          <a:bodyPr wrap="square" rtlCol="0" anchor="ctr"/>
-          <a:lstStyle/>
-          <a:p>
-            <a:pPr marL="0" indent="0">
-              <a:buNone/>
-            </a:pPr>
-            <a:r>
-              <a:rPr lang="en-US" sz="1050" dirty="0">
-                <a:solidFill>
-                  <a:srgbClr val="2D3748"/>
-                </a:solidFill>
-                <a:latin typeface="Consolas" pitchFamily="34" charset="0"/>
-                <a:ea typeface="Consolas" pitchFamily="34" charset="-122"/>
-                <a:cs typeface="Consolas" pitchFamily="34" charset="-120"/>
-              </a:rPr>
-              <a:t>เปลี่ยน solve satisfy → minimize แล้วรัน</a:t>
-            </a:r>
-            <a:endParaRPr lang="en-US" sz="1050" dirty="0"/>
           </a:p>
         </p:txBody>
       </p:sp>
@@ -21831,45 +21675,6 @@
       </p:sp>
       <p:sp>
         <p:nvSpPr>
-          <p:cNvPr id="12" name="Text 10"/>
-          <p:cNvSpPr/>
-          <p:nvPr/>
-        </p:nvSpPr>
-        <p:spPr>
-          <a:xfrm>
-            <a:off x="3931920" y="2304288"/>
-            <a:ext cx="4754880" cy="420624"/>
-          </a:xfrm>
-          <a:prstGeom prst="rect">
-            <a:avLst/>
-          </a:prstGeom>
-          <a:noFill/>
-          <a:ln/>
-        </p:spPr>
-        <p:txBody>
-          <a:bodyPr wrap="square" rtlCol="0" anchor="ctr"/>
-          <a:lstStyle/>
-          <a:p>
-            <a:pPr marL="0" indent="0">
-              <a:buNone/>
-            </a:pPr>
-            <a:r>
-              <a:rPr lang="en-US" sz="1050" dirty="0">
-                <a:solidFill>
-                  <a:srgbClr val="2D3748"/>
-                </a:solidFill>
-                <a:latin typeface="Consolas" pitchFamily="34" charset="0"/>
-                <a:ea typeface="Consolas" pitchFamily="34" charset="-122"/>
-                <a:cs typeface="Consolas" pitchFamily="34" charset="-120"/>
-              </a:rPr>
-              <a:t>forall(j,t)( dur[j,t,machine[j,t]] &gt; 0 )</a:t>
-            </a:r>
-            <a:endParaRPr lang="en-US" sz="1050" dirty="0"/>
-          </a:p>
-        </p:txBody>
-      </p:sp>
-      <p:sp>
-        <p:nvSpPr>
           <p:cNvPr id="13" name="Shape 11"/>
           <p:cNvSpPr/>
           <p:nvPr/>
@@ -22002,45 +21807,6 @@
       </p:sp>
       <p:sp>
         <p:nvSpPr>
-          <p:cNvPr id="17" name="Text 15"/>
-          <p:cNvSpPr/>
-          <p:nvPr/>
-        </p:nvSpPr>
-        <p:spPr>
-          <a:xfrm>
-            <a:off x="3931920" y="2779776"/>
-            <a:ext cx="4754880" cy="420624"/>
-          </a:xfrm>
-          <a:prstGeom prst="rect">
-            <a:avLst/>
-          </a:prstGeom>
-          <a:noFill/>
-          <a:ln/>
-        </p:spPr>
-        <p:txBody>
-          <a:bodyPr wrap="square" rtlCol="0" anchor="ctr"/>
-          <a:lstStyle/>
-          <a:p>
-            <a:pPr marL="0" indent="0">
-              <a:buNone/>
-            </a:pPr>
-            <a:r>
-              <a:rPr lang="en-US" sz="1050" dirty="0">
-                <a:solidFill>
-                  <a:srgbClr val="2D3748"/>
-                </a:solidFill>
-                <a:latin typeface="Consolas" pitchFamily="34" charset="0"/>
-                <a:ea typeface="Consolas" pitchFamily="34" charset="-122"/>
-                <a:cs typeface="Consolas" pitchFamily="34" charset="-120"/>
-              </a:rPr>
-              <a:t>start[j,t]+dur[j,t,machine[j,t]] &lt;= start[j,enum_next(TASK,t)]</a:t>
-            </a:r>
-            <a:endParaRPr lang="en-US" sz="1050" dirty="0"/>
-          </a:p>
-        </p:txBody>
-      </p:sp>
-      <p:sp>
-        <p:nvSpPr>
           <p:cNvPr id="18" name="Shape 16"/>
           <p:cNvSpPr/>
           <p:nvPr/>
@@ -22173,45 +21939,6 @@
       </p:sp>
       <p:sp>
         <p:nvSpPr>
-          <p:cNvPr id="22" name="Text 20"/>
-          <p:cNvSpPr/>
-          <p:nvPr/>
-        </p:nvSpPr>
-        <p:spPr>
-          <a:xfrm>
-            <a:off x="3931920" y="3255264"/>
-            <a:ext cx="4754880" cy="420624"/>
-          </a:xfrm>
-          <a:prstGeom prst="rect">
-            <a:avLst/>
-          </a:prstGeom>
-          <a:noFill/>
-          <a:ln/>
-        </p:spPr>
-        <p:txBody>
-          <a:bodyPr wrap="square" rtlCol="0" anchor="ctr"/>
-          <a:lstStyle/>
-          <a:p>
-            <a:pPr marL="0" indent="0">
-              <a:buNone/>
-            </a:pPr>
-            <a:r>
-              <a:rPr lang="en-US" sz="1050" dirty="0">
-                <a:solidFill>
-                  <a:srgbClr val="2D3748"/>
-                </a:solidFill>
-                <a:latin typeface="Consolas" pitchFamily="34" charset="0"/>
-                <a:ea typeface="Consolas" pitchFamily="34" charset="-122"/>
-                <a:cs typeface="Consolas" pitchFamily="34" charset="-120"/>
-              </a:rPr>
-              <a:t>machine[j,t]=m /\ machine[k,t]=m -&gt; no_overlap(...)</a:t>
-            </a:r>
-            <a:endParaRPr lang="en-US" sz="1050" dirty="0"/>
-          </a:p>
-        </p:txBody>
-      </p:sp>
-      <p:sp>
-        <p:nvSpPr>
           <p:cNvPr id="23" name="Shape 21"/>
           <p:cNvSpPr/>
           <p:nvPr/>
@@ -22339,45 +22066,6 @@
               <a:t>solve minimize makespan: </a:t>
             </a:r>
             <a:endParaRPr lang="en-US" sz="1150" dirty="0"/>
-          </a:p>
-        </p:txBody>
-      </p:sp>
-      <p:sp>
-        <p:nvSpPr>
-          <p:cNvPr id="27" name="Text 25"/>
-          <p:cNvSpPr/>
-          <p:nvPr/>
-        </p:nvSpPr>
-        <p:spPr>
-          <a:xfrm>
-            <a:off x="3931920" y="3730752"/>
-            <a:ext cx="4754880" cy="420624"/>
-          </a:xfrm>
-          <a:prstGeom prst="rect">
-            <a:avLst/>
-          </a:prstGeom>
-          <a:noFill/>
-          <a:ln/>
-        </p:spPr>
-        <p:txBody>
-          <a:bodyPr wrap="square" rtlCol="0" anchor="ctr"/>
-          <a:lstStyle/>
-          <a:p>
-            <a:pPr marL="0" indent="0">
-              <a:buNone/>
-            </a:pPr>
-            <a:r>
-              <a:rPr lang="en-US" sz="1050" dirty="0">
-                <a:solidFill>
-                  <a:srgbClr val="2D3748"/>
-                </a:solidFill>
-                <a:latin typeface="Consolas" pitchFamily="34" charset="0"/>
-                <a:ea typeface="Consolas" pitchFamily="34" charset="-122"/>
-                <a:cs typeface="Consolas" pitchFamily="34" charset="-120"/>
-              </a:rPr>
-              <a:t>เปลี่ยน solve satisfy → solve minimize makespan; แล้วรัน</a:t>
-            </a:r>
-            <a:endParaRPr lang="en-US" sz="1050" dirty="0"/>
           </a:p>
         </p:txBody>
       </p:sp>

--- a/day4/Day4_MiniZinc_Slides .pptx
+++ b/day4/Day4_MiniZinc_Slides .pptx
@@ -3608,7 +3608,18 @@
                 <a:ea typeface="Consolas" pitchFamily="34" charset="-122"/>
                 <a:cs typeface="Consolas" pitchFamily="34" charset="-120"/>
               </a:rPr>
-              <a:t>กะดึกรวม</a:t>
+              <a:t>กะดึก</a:t>
+            </a:r>
+            <a:r>
+              <a:rPr lang="th-TH" sz="1050" dirty="0">
+                <a:solidFill>
+                  <a:srgbClr val="718096"/>
+                </a:solidFill>
+                <a:latin typeface="Consolas" pitchFamily="34" charset="0"/>
+                <a:ea typeface="Consolas" pitchFamily="34" charset="-122"/>
+                <a:cs typeface="Consolas" pitchFamily="34" charset="-120"/>
+              </a:rPr>
+              <a:t>ของทุกคน</a:t>
             </a:r>
             <a:endParaRPr lang="en-US" sz="1050" dirty="0"/>
           </a:p>
@@ -3636,7 +3647,7 @@
                 <a:ea typeface="Consolas" pitchFamily="34" charset="-122"/>
                 <a:cs typeface="Consolas" pitchFamily="34" charset="-120"/>
               </a:rPr>
-              <a:t>: nights = sum(e,d)(</a:t>
+              <a:t>: nights = max(e)(sum(d)(</a:t>
             </a:r>
             <a:r>
               <a:rPr lang="en-US" sz="1050" dirty="0">
@@ -3658,7 +3669,29 @@
                 <a:ea typeface="Consolas" pitchFamily="34" charset="-122"/>
                 <a:cs typeface="Consolas" pitchFamily="34" charset="-120"/>
               </a:rPr>
-              <a:t>(roster[e,d]=N));</a:t>
+              <a:t>(roster[</a:t>
+            </a:r>
+            <a:r>
+              <a:rPr lang="en-US" sz="1050" dirty="0" err="1">
+                <a:solidFill>
+                  <a:srgbClr val="E8EDF2"/>
+                </a:solidFill>
+                <a:latin typeface="Consolas" pitchFamily="34" charset="0"/>
+                <a:ea typeface="Consolas" pitchFamily="34" charset="-122"/>
+                <a:cs typeface="Consolas" pitchFamily="34" charset="-120"/>
+              </a:rPr>
+              <a:t>e,d</a:t>
+            </a:r>
+            <a:r>
+              <a:rPr lang="en-US" sz="1050" dirty="0">
+                <a:solidFill>
+                  <a:srgbClr val="E8EDF2"/>
+                </a:solidFill>
+                <a:latin typeface="Consolas" pitchFamily="34" charset="0"/>
+                <a:ea typeface="Consolas" pitchFamily="34" charset="-122"/>
+                <a:cs typeface="Consolas" pitchFamily="34" charset="-120"/>
+              </a:rPr>
+              <a:t>]=N)));</a:t>
             </a:r>
             <a:r>
               <a:rPr lang="en-US" sz="1050" dirty="0">

--- a/day4/Day4_MiniZinc_Slides .pptx
+++ b/day4/Day4_MiniZinc_Slides .pptx
@@ -5293,7 +5293,7 @@
         </p:nvSpPr>
         <p:spPr>
           <a:xfrm>
-            <a:off x="365760" y="1078992"/>
+            <a:off x="365760" y="862862"/>
             <a:ext cx="8412480" cy="384048"/>
           </a:xfrm>
           <a:prstGeom prst="rect">
@@ -5318,7 +5318,29 @@
                 <a:ea typeface="Calibri" pitchFamily="34" charset="-122"/>
                 <a:cs typeface="Calibri" pitchFamily="34" charset="-120"/>
               </a:rPr>
-              <a:t>กฎ: ห้ามกะดึก (N) 3 คืนติดกัน  |  ในทุก 4 วัน ต้องมีหยุด (O) อย่างน้อย 1 วัน</a:t>
+              <a:t>กฎ: ห้ามกะดึก (N) 2 คืนติดกัน  |  </a:t>
+            </a:r>
+            <a:r>
+              <a:rPr lang="en-US" sz="1250" i="1" dirty="0" err="1">
+                <a:solidFill>
+                  <a:srgbClr val="2D3748"/>
+                </a:solidFill>
+                <a:latin typeface="Calibri" pitchFamily="34" charset="0"/>
+                <a:ea typeface="Calibri" pitchFamily="34" charset="-122"/>
+                <a:cs typeface="Calibri" pitchFamily="34" charset="-120"/>
+              </a:rPr>
+              <a:t>ในทุก</a:t>
+            </a:r>
+            <a:r>
+              <a:rPr lang="en-US" sz="1250" i="1" dirty="0">
+                <a:solidFill>
+                  <a:srgbClr val="2D3748"/>
+                </a:solidFill>
+                <a:latin typeface="Calibri" pitchFamily="34" charset="0"/>
+                <a:ea typeface="Calibri" pitchFamily="34" charset="-122"/>
+                <a:cs typeface="Calibri" pitchFamily="34" charset="-120"/>
+              </a:rPr>
+              <a:t> 4 วัน ต้องมีหยุด (O) อย่างน้อย 1 วัน</a:t>
             </a:r>
             <a:endParaRPr lang="en-US" sz="1250" dirty="0"/>
           </a:p>
@@ -5332,7 +5354,7 @@
         </p:nvSpPr>
         <p:spPr>
           <a:xfrm>
-            <a:off x="548640" y="1664208"/>
+            <a:off x="548640" y="1406511"/>
             <a:ext cx="1097280" cy="566928"/>
           </a:xfrm>
           <a:prstGeom prst="rect">
@@ -5364,7 +5386,7 @@
         </p:nvSpPr>
         <p:spPr>
           <a:xfrm>
-            <a:off x="548640" y="1664208"/>
+            <a:off x="548640" y="1406511"/>
             <a:ext cx="1097280" cy="320040"/>
           </a:xfrm>
           <a:prstGeom prst="rect">
@@ -5389,7 +5411,7 @@
                 <a:ea typeface="Calibri" pitchFamily="34" charset="-122"/>
                 <a:cs typeface="Calibri" pitchFamily="34" charset="-120"/>
               </a:rPr>
-              <a:t>S1</a:t>
+              <a:t>S0</a:t>
             </a:r>
             <a:endParaRPr lang="en-US" sz="1400" dirty="0"/>
           </a:p>
@@ -5403,7 +5425,7 @@
         </p:nvSpPr>
         <p:spPr>
           <a:xfrm>
-            <a:off x="548640" y="1984248"/>
+            <a:off x="548640" y="1726551"/>
             <a:ext cx="1097280" cy="246888"/>
           </a:xfrm>
           <a:prstGeom prst="rect">
@@ -5442,7 +5464,7 @@
         </p:nvSpPr>
         <p:spPr>
           <a:xfrm>
-            <a:off x="2286000" y="1664208"/>
+            <a:off x="2286000" y="1406511"/>
             <a:ext cx="1097280" cy="566928"/>
           </a:xfrm>
           <a:prstGeom prst="rect">
@@ -5474,7 +5496,7 @@
         </p:nvSpPr>
         <p:spPr>
           <a:xfrm>
-            <a:off x="2286000" y="1664208"/>
+            <a:off x="2286000" y="1406511"/>
             <a:ext cx="1097280" cy="320040"/>
           </a:xfrm>
           <a:prstGeom prst="rect">
@@ -5499,7 +5521,7 @@
                 <a:ea typeface="Calibri" pitchFamily="34" charset="-122"/>
                 <a:cs typeface="Calibri" pitchFamily="34" charset="-120"/>
               </a:rPr>
-              <a:t>S2</a:t>
+              <a:t>S1</a:t>
             </a:r>
             <a:endParaRPr lang="en-US" sz="1400" dirty="0"/>
           </a:p>
@@ -5513,7 +5535,7 @@
         </p:nvSpPr>
         <p:spPr>
           <a:xfrm>
-            <a:off x="2286000" y="1984248"/>
+            <a:off x="2286000" y="1726551"/>
             <a:ext cx="1097280" cy="246888"/>
           </a:xfrm>
           <a:prstGeom prst="rect">
@@ -5552,7 +5574,7 @@
         </p:nvSpPr>
         <p:spPr>
           <a:xfrm>
-            <a:off x="4023360" y="1664208"/>
+            <a:off x="4023360" y="1406511"/>
             <a:ext cx="1097280" cy="566928"/>
           </a:xfrm>
           <a:prstGeom prst="rect">
@@ -5584,7 +5606,7 @@
         </p:nvSpPr>
         <p:spPr>
           <a:xfrm>
-            <a:off x="4023360" y="1664208"/>
+            <a:off x="4023360" y="1406511"/>
             <a:ext cx="1097280" cy="320040"/>
           </a:xfrm>
           <a:prstGeom prst="rect">
@@ -5609,7 +5631,7 @@
                 <a:ea typeface="Calibri" pitchFamily="34" charset="-122"/>
                 <a:cs typeface="Calibri" pitchFamily="34" charset="-120"/>
               </a:rPr>
-              <a:t>S3</a:t>
+              <a:t>S2</a:t>
             </a:r>
             <a:endParaRPr lang="en-US" sz="1400" dirty="0"/>
           </a:p>
@@ -5623,7 +5645,7 @@
         </p:nvSpPr>
         <p:spPr>
           <a:xfrm>
-            <a:off x="4023360" y="1984248"/>
+            <a:off x="4023360" y="1726551"/>
             <a:ext cx="1097280" cy="246888"/>
           </a:xfrm>
           <a:prstGeom prst="rect">
@@ -5662,7 +5684,7 @@
         </p:nvSpPr>
         <p:spPr>
           <a:xfrm>
-            <a:off x="5760720" y="1664208"/>
+            <a:off x="5760720" y="1406511"/>
             <a:ext cx="1097280" cy="566928"/>
           </a:xfrm>
           <a:prstGeom prst="rect">
@@ -5694,7 +5716,7 @@
         </p:nvSpPr>
         <p:spPr>
           <a:xfrm>
-            <a:off x="5760720" y="1664208"/>
+            <a:off x="5760720" y="1406511"/>
             <a:ext cx="1097280" cy="320040"/>
           </a:xfrm>
           <a:prstGeom prst="rect">
@@ -5719,7 +5741,7 @@
                 <a:ea typeface="Calibri" pitchFamily="34" charset="-122"/>
                 <a:cs typeface="Calibri" pitchFamily="34" charset="-120"/>
               </a:rPr>
-              <a:t>S4</a:t>
+              <a:t>S3</a:t>
             </a:r>
             <a:endParaRPr lang="en-US" sz="1400" dirty="0"/>
           </a:p>
@@ -5733,7 +5755,7 @@
         </p:nvSpPr>
         <p:spPr>
           <a:xfrm>
-            <a:off x="5760720" y="1984248"/>
+            <a:off x="5760720" y="1726551"/>
             <a:ext cx="1097280" cy="246888"/>
           </a:xfrm>
           <a:prstGeom prst="rect">
@@ -5772,7 +5794,7 @@
         </p:nvSpPr>
         <p:spPr>
           <a:xfrm>
-            <a:off x="4023360" y="2440046"/>
+            <a:off x="4023360" y="2182349"/>
             <a:ext cx="1097280" cy="566928"/>
           </a:xfrm>
           <a:prstGeom prst="rect">
@@ -5804,7 +5826,7 @@
         </p:nvSpPr>
         <p:spPr>
           <a:xfrm>
-            <a:off x="4023360" y="2440046"/>
+            <a:off x="4023360" y="2182349"/>
             <a:ext cx="1097280" cy="320040"/>
           </a:xfrm>
           <a:prstGeom prst="rect">
@@ -5843,7 +5865,7 @@
         </p:nvSpPr>
         <p:spPr>
           <a:xfrm>
-            <a:off x="4023360" y="2760086"/>
+            <a:off x="4023360" y="2502389"/>
             <a:ext cx="1097280" cy="246888"/>
           </a:xfrm>
           <a:prstGeom prst="rect">
@@ -5860,7 +5882,7 @@
               <a:buNone/>
             </a:pPr>
             <a:r>
-              <a:rPr lang="en-US" sz="850" dirty="0">
+              <a:rPr lang="th-TH" sz="850" dirty="0">
                 <a:solidFill>
                   <a:srgbClr val="CBD5E0"/>
                 </a:solidFill>
@@ -5868,7 +5890,62 @@
                 <a:ea typeface="Calibri" pitchFamily="34" charset="-122"/>
                 <a:cs typeface="Calibri" pitchFamily="34" charset="-120"/>
               </a:rPr>
-              <a:t>ดึก 1 คืน</a:t>
+              <a:t>ทำงาน </a:t>
+            </a:r>
+            <a:r>
+              <a:rPr lang="en-US" sz="850" dirty="0">
+                <a:solidFill>
+                  <a:srgbClr val="CBD5E0"/>
+                </a:solidFill>
+                <a:latin typeface="Calibri" pitchFamily="34" charset="0"/>
+                <a:ea typeface="Calibri" pitchFamily="34" charset="-122"/>
+                <a:cs typeface="Calibri" pitchFamily="34" charset="-120"/>
+              </a:rPr>
+              <a:t>1 </a:t>
+            </a:r>
+            <a:r>
+              <a:rPr lang="th-TH" sz="850" dirty="0">
+                <a:solidFill>
+                  <a:srgbClr val="CBD5E0"/>
+                </a:solidFill>
+                <a:latin typeface="Calibri" pitchFamily="34" charset="0"/>
+                <a:ea typeface="Calibri" pitchFamily="34" charset="-122"/>
+                <a:cs typeface="Calibri" pitchFamily="34" charset="-120"/>
+              </a:rPr>
+              <a:t>วัน </a:t>
+            </a:r>
+            <a:r>
+              <a:rPr lang="en-US" sz="850" dirty="0">
+                <a:solidFill>
+                  <a:srgbClr val="CBD5E0"/>
+                </a:solidFill>
+                <a:latin typeface="Calibri" pitchFamily="34" charset="0"/>
+                <a:ea typeface="Calibri" pitchFamily="34" charset="-122"/>
+                <a:cs typeface="Calibri" pitchFamily="34" charset="-120"/>
+              </a:rPr>
+              <a:t>+</a:t>
+            </a:r>
+            <a:r>
+              <a:rPr lang="en-US" sz="850" dirty="0" err="1">
+                <a:solidFill>
+                  <a:srgbClr val="CBD5E0"/>
+                </a:solidFill>
+                <a:latin typeface="Calibri" pitchFamily="34" charset="0"/>
+                <a:ea typeface="Calibri" pitchFamily="34" charset="-122"/>
+                <a:cs typeface="Calibri" pitchFamily="34" charset="-120"/>
+              </a:rPr>
+              <a:t>ดึก</a:t>
+            </a:r>
+            <a:r>
+              <a:rPr lang="en-US" sz="850" dirty="0">
+                <a:solidFill>
+                  <a:srgbClr val="CBD5E0"/>
+                </a:solidFill>
+                <a:latin typeface="Calibri" pitchFamily="34" charset="0"/>
+                <a:ea typeface="Calibri" pitchFamily="34" charset="-122"/>
+                <a:cs typeface="Calibri" pitchFamily="34" charset="-120"/>
+              </a:rPr>
+              <a:t> 1 คืน</a:t>
             </a:r>
             <a:endParaRPr lang="en-US" sz="850" dirty="0"/>
           </a:p>
@@ -5882,7 +5959,7 @@
         </p:nvSpPr>
         <p:spPr>
           <a:xfrm>
-            <a:off x="5760720" y="2440046"/>
+            <a:off x="5760720" y="2182349"/>
             <a:ext cx="1097280" cy="566928"/>
           </a:xfrm>
           <a:prstGeom prst="rect">
@@ -5914,7 +5991,7 @@
         </p:nvSpPr>
         <p:spPr>
           <a:xfrm>
-            <a:off x="5760720" y="2440046"/>
+            <a:off x="5760720" y="2182349"/>
             <a:ext cx="1097280" cy="320040"/>
           </a:xfrm>
           <a:prstGeom prst="rect">
@@ -5953,7 +6030,7 @@
         </p:nvSpPr>
         <p:spPr>
           <a:xfrm>
-            <a:off x="5760720" y="2760086"/>
+            <a:off x="5760720" y="2502389"/>
             <a:ext cx="1097280" cy="246888"/>
           </a:xfrm>
           <a:prstGeom prst="rect">
@@ -5970,7 +6047,7 @@
               <a:buNone/>
             </a:pPr>
             <a:r>
-              <a:rPr lang="en-US" sz="850" dirty="0">
+              <a:rPr lang="th-TH" sz="850" dirty="0">
                 <a:solidFill>
                   <a:srgbClr val="CBD5E0"/>
                 </a:solidFill>
@@ -5978,7 +6055,62 @@
                 <a:ea typeface="Calibri" pitchFamily="34" charset="-122"/>
                 <a:cs typeface="Calibri" pitchFamily="34" charset="-120"/>
               </a:rPr>
-              <a:t>ดึก 2 คืน</a:t>
+              <a:t>ทำงาน </a:t>
+            </a:r>
+            <a:r>
+              <a:rPr lang="en-US" sz="850" dirty="0">
+                <a:solidFill>
+                  <a:srgbClr val="CBD5E0"/>
+                </a:solidFill>
+                <a:latin typeface="Calibri" pitchFamily="34" charset="0"/>
+                <a:ea typeface="Calibri" pitchFamily="34" charset="-122"/>
+                <a:cs typeface="Calibri" pitchFamily="34" charset="-120"/>
+              </a:rPr>
+              <a:t>2 </a:t>
+            </a:r>
+            <a:r>
+              <a:rPr lang="th-TH" sz="850" dirty="0">
+                <a:solidFill>
+                  <a:srgbClr val="CBD5E0"/>
+                </a:solidFill>
+                <a:latin typeface="Calibri" pitchFamily="34" charset="0"/>
+                <a:ea typeface="Calibri" pitchFamily="34" charset="-122"/>
+                <a:cs typeface="Calibri" pitchFamily="34" charset="-120"/>
+              </a:rPr>
+              <a:t>วัน </a:t>
+            </a:r>
+            <a:r>
+              <a:rPr lang="en-US" sz="850" dirty="0">
+                <a:solidFill>
+                  <a:srgbClr val="CBD5E0"/>
+                </a:solidFill>
+                <a:latin typeface="Calibri" pitchFamily="34" charset="0"/>
+                <a:ea typeface="Calibri" pitchFamily="34" charset="-122"/>
+                <a:cs typeface="Calibri" pitchFamily="34" charset="-120"/>
+              </a:rPr>
+              <a:t>+</a:t>
+            </a:r>
+            <a:r>
+              <a:rPr lang="en-US" sz="850" dirty="0" err="1">
+                <a:solidFill>
+                  <a:srgbClr val="CBD5E0"/>
+                </a:solidFill>
+                <a:latin typeface="Calibri" pitchFamily="34" charset="0"/>
+                <a:ea typeface="Calibri" pitchFamily="34" charset="-122"/>
+                <a:cs typeface="Calibri" pitchFamily="34" charset="-120"/>
+              </a:rPr>
+              <a:t>ดึก</a:t>
+            </a:r>
+            <a:r>
+              <a:rPr lang="en-US" sz="850" dirty="0">
+                <a:solidFill>
+                  <a:srgbClr val="CBD5E0"/>
+                </a:solidFill>
+                <a:latin typeface="Calibri" pitchFamily="34" charset="0"/>
+                <a:ea typeface="Calibri" pitchFamily="34" charset="-122"/>
+                <a:cs typeface="Calibri" pitchFamily="34" charset="-120"/>
+              </a:rPr>
+              <a:t> 1 คืน</a:t>
             </a:r>
             <a:endParaRPr lang="en-US" sz="850" dirty="0"/>
           </a:p>
@@ -5992,7 +6124,7 @@
         </p:nvSpPr>
         <p:spPr>
           <a:xfrm>
-            <a:off x="365760" y="2800859"/>
+            <a:off x="365760" y="2543162"/>
             <a:ext cx="8412480" cy="292608"/>
           </a:xfrm>
           <a:prstGeom prst="rect">
@@ -6032,14 +6164,14 @@
           <p:nvPr>
             <p:extLst>
               <p:ext uri="{D42A27DB-BD31-4B8C-83A1-F6EECF244321}">
-                <p14:modId xmlns:p14="http://schemas.microsoft.com/office/powerpoint/2010/main" val="3842791169"/>
+                <p14:modId xmlns:p14="http://schemas.microsoft.com/office/powerpoint/2010/main" val="418986333"/>
               </p:ext>
             </p:extLst>
           </p:nvPr>
         </p:nvGraphicFramePr>
         <p:xfrm>
-          <a:off x="365760" y="3120899"/>
-          <a:ext cx="8412480" cy="1752600"/>
+          <a:off x="365760" y="2863202"/>
+          <a:ext cx="8412480" cy="2004060"/>
         </p:xfrm>
         <a:graphic>
           <a:graphicData uri="http://schemas.openxmlformats.org/drawingml/2006/table">
@@ -6161,7 +6293,7 @@
                           <a:ea typeface="Calibri" pitchFamily="34" charset="-122"/>
                           <a:cs typeface="Calibri" pitchFamily="34" charset="-120"/>
                         </a:rPr>
-                        <a:t>d (day)</a:t>
+                        <a:t>D (day)</a:t>
                       </a:r>
                       <a:endParaRPr lang="en-US" sz="1000" dirty="0">
                         <a:latin typeface="Calibri" charset="0"/>
@@ -6229,7 +6361,7 @@
                           <a:ea typeface="Calibri" pitchFamily="34" charset="-122"/>
                           <a:cs typeface="Calibri" pitchFamily="34" charset="-120"/>
                         </a:rPr>
-                        <a:t>n (night)</a:t>
+                        <a:t>N (night)</a:t>
                       </a:r>
                       <a:endParaRPr lang="en-US" sz="1000" dirty="0">
                         <a:latin typeface="Calibri" charset="0"/>
@@ -6297,7 +6429,7 @@
                           <a:ea typeface="Calibri" pitchFamily="34" charset="-122"/>
                           <a:cs typeface="Calibri" pitchFamily="34" charset="-120"/>
                         </a:rPr>
-                        <a:t>o (off)</a:t>
+                        <a:t>O(off)</a:t>
                       </a:r>
                       <a:endParaRPr lang="en-US" sz="1000" dirty="0">
                         <a:latin typeface="Calibri" charset="0"/>
@@ -6351,6 +6483,241 @@
                 <a:extLst>
                   <a:ext uri="{0D108BD9-81ED-4DB2-BD59-A6C34878D82A}">
                     <a16:rowId xmlns:a16="http://schemas.microsoft.com/office/drawing/2014/main" val="10000"/>
+                  </a:ext>
+                </a:extLst>
+              </a:tr>
+              <a:tr h="130629">
+                <a:tc>
+                  <a:txBody>
+                    <a:bodyPr/>
+                    <a:lstStyle/>
+                    <a:p>
+                      <a:pPr marL="0" indent="0">
+                        <a:buNone/>
+                      </a:pPr>
+                      <a:r>
+                        <a:rPr lang="en-US" sz="1050" dirty="0">
+                          <a:latin typeface="Calibri" charset="0"/>
+                          <a:ea typeface="Calibri" charset="0"/>
+                          <a:cs typeface="Calibri" charset="0"/>
+                        </a:rPr>
+                        <a:t>S0</a:t>
+                      </a:r>
+                    </a:p>
+                  </a:txBody>
+                  <a:tcPr>
+                    <a:lnL w="6350" cap="flat" cmpd="sng" algn="ctr">
+                      <a:solidFill>
+                        <a:srgbClr val="CBD5E0"/>
+                      </a:solidFill>
+                      <a:prstDash val="solid"/>
+                      <a:round/>
+                      <a:headEnd type="none" w="med" len="med"/>
+                      <a:tailEnd type="none" w="med" len="med"/>
+                    </a:lnL>
+                    <a:lnR w="6350" cap="flat" cmpd="sng" algn="ctr">
+                      <a:solidFill>
+                        <a:srgbClr val="CBD5E0"/>
+                      </a:solidFill>
+                      <a:prstDash val="solid"/>
+                      <a:round/>
+                      <a:headEnd type="none" w="med" len="med"/>
+                      <a:tailEnd type="none" w="med" len="med"/>
+                    </a:lnR>
+                    <a:lnT w="6350" cap="flat" cmpd="sng" algn="ctr">
+                      <a:solidFill>
+                        <a:srgbClr val="CBD5E0"/>
+                      </a:solidFill>
+                      <a:prstDash val="solid"/>
+                      <a:round/>
+                      <a:headEnd type="none" w="med" len="med"/>
+                      <a:tailEnd type="none" w="med" len="med"/>
+                    </a:lnT>
+                    <a:lnB w="6350" cap="flat" cmpd="sng" algn="ctr">
+                      <a:solidFill>
+                        <a:srgbClr val="CBD5E0"/>
+                      </a:solidFill>
+                      <a:prstDash val="solid"/>
+                      <a:round/>
+                      <a:headEnd type="none" w="med" len="med"/>
+                      <a:tailEnd type="none" w="med" len="med"/>
+                    </a:lnB>
+                  </a:tcPr>
+                </a:tc>
+                <a:tc>
+                  <a:txBody>
+                    <a:bodyPr/>
+                    <a:lstStyle/>
+                    <a:p>
+                      <a:pPr marL="0" indent="0">
+                        <a:buNone/>
+                      </a:pPr>
+                      <a:r>
+                        <a:rPr lang="en-US" sz="1050" dirty="0">
+                          <a:latin typeface="Calibri" charset="0"/>
+                          <a:ea typeface="Calibri" charset="0"/>
+                          <a:cs typeface="Calibri" charset="0"/>
+                        </a:rPr>
+                        <a:t>S1</a:t>
+                      </a:r>
+                    </a:p>
+                  </a:txBody>
+                  <a:tcPr>
+                    <a:lnL w="6350" cap="flat" cmpd="sng" algn="ctr">
+                      <a:solidFill>
+                        <a:srgbClr val="CBD5E0"/>
+                      </a:solidFill>
+                      <a:prstDash val="solid"/>
+                      <a:round/>
+                      <a:headEnd type="none" w="med" len="med"/>
+                      <a:tailEnd type="none" w="med" len="med"/>
+                    </a:lnL>
+                    <a:lnR w="6350" cap="flat" cmpd="sng" algn="ctr">
+                      <a:solidFill>
+                        <a:srgbClr val="CBD5E0"/>
+                      </a:solidFill>
+                      <a:prstDash val="solid"/>
+                      <a:round/>
+                      <a:headEnd type="none" w="med" len="med"/>
+                      <a:tailEnd type="none" w="med" len="med"/>
+                    </a:lnR>
+                    <a:lnT w="6350" cap="flat" cmpd="sng" algn="ctr">
+                      <a:solidFill>
+                        <a:srgbClr val="CBD5E0"/>
+                      </a:solidFill>
+                      <a:prstDash val="solid"/>
+                      <a:round/>
+                      <a:headEnd type="none" w="med" len="med"/>
+                      <a:tailEnd type="none" w="med" len="med"/>
+                    </a:lnT>
+                    <a:lnB w="6350" cap="flat" cmpd="sng" algn="ctr">
+                      <a:solidFill>
+                        <a:srgbClr val="CBD5E0"/>
+                      </a:solidFill>
+                      <a:prstDash val="solid"/>
+                      <a:round/>
+                      <a:headEnd type="none" w="med" len="med"/>
+                      <a:tailEnd type="none" w="med" len="med"/>
+                    </a:lnB>
+                  </a:tcPr>
+                </a:tc>
+                <a:tc>
+                  <a:txBody>
+                    <a:bodyPr/>
+                    <a:lstStyle/>
+                    <a:p>
+                      <a:pPr marL="0" indent="0">
+                        <a:buNone/>
+                      </a:pPr>
+                      <a:r>
+                        <a:rPr lang="en-US" sz="1050" dirty="0">
+                          <a:latin typeface="Calibri" charset="0"/>
+                          <a:ea typeface="Calibri" charset="0"/>
+                          <a:cs typeface="Calibri" charset="0"/>
+                        </a:rPr>
+                        <a:t>S4</a:t>
+                      </a:r>
+                    </a:p>
+                  </a:txBody>
+                  <a:tcPr>
+                    <a:lnL w="6350" cap="flat" cmpd="sng" algn="ctr">
+                      <a:solidFill>
+                        <a:srgbClr val="CBD5E0"/>
+                      </a:solidFill>
+                      <a:prstDash val="solid"/>
+                      <a:round/>
+                      <a:headEnd type="none" w="med" len="med"/>
+                      <a:tailEnd type="none" w="med" len="med"/>
+                    </a:lnL>
+                    <a:lnR w="6350" cap="flat" cmpd="sng" algn="ctr">
+                      <a:solidFill>
+                        <a:srgbClr val="CBD5E0"/>
+                      </a:solidFill>
+                      <a:prstDash val="solid"/>
+                      <a:round/>
+                      <a:headEnd type="none" w="med" len="med"/>
+                      <a:tailEnd type="none" w="med" len="med"/>
+                    </a:lnR>
+                    <a:lnT w="6350" cap="flat" cmpd="sng" algn="ctr">
+                      <a:solidFill>
+                        <a:srgbClr val="CBD5E0"/>
+                      </a:solidFill>
+                      <a:prstDash val="solid"/>
+                      <a:round/>
+                      <a:headEnd type="none" w="med" len="med"/>
+                      <a:tailEnd type="none" w="med" len="med"/>
+                    </a:lnT>
+                    <a:lnB w="6350" cap="flat" cmpd="sng" algn="ctr">
+                      <a:solidFill>
+                        <a:srgbClr val="CBD5E0"/>
+                      </a:solidFill>
+                      <a:prstDash val="solid"/>
+                      <a:round/>
+                      <a:headEnd type="none" w="med" len="med"/>
+                      <a:tailEnd type="none" w="med" len="med"/>
+                    </a:lnB>
+                  </a:tcPr>
+                </a:tc>
+                <a:tc>
+                  <a:txBody>
+                    <a:bodyPr/>
+                    <a:lstStyle/>
+                    <a:p>
+                      <a:pPr marL="0" indent="0">
+                        <a:buNone/>
+                      </a:pPr>
+                      <a:r>
+                        <a:rPr lang="en-US" sz="1050" dirty="0">
+                          <a:latin typeface="Calibri" charset="0"/>
+                          <a:ea typeface="Calibri" charset="0"/>
+                          <a:cs typeface="Calibri" charset="0"/>
+                        </a:rPr>
+                        <a:t>S0</a:t>
+                      </a:r>
+                    </a:p>
+                  </a:txBody>
+                  <a:tcPr>
+                    <a:lnL w="6350" cap="flat" cmpd="sng" algn="ctr">
+                      <a:solidFill>
+                        <a:srgbClr val="CBD5E0"/>
+                      </a:solidFill>
+                      <a:prstDash val="solid"/>
+                      <a:round/>
+                      <a:headEnd type="none" w="med" len="med"/>
+                      <a:tailEnd type="none" w="med" len="med"/>
+                    </a:lnL>
+                    <a:lnR w="6350" cap="flat" cmpd="sng" algn="ctr">
+                      <a:solidFill>
+                        <a:srgbClr val="CBD5E0"/>
+                      </a:solidFill>
+                      <a:prstDash val="solid"/>
+                      <a:round/>
+                      <a:headEnd type="none" w="med" len="med"/>
+                      <a:tailEnd type="none" w="med" len="med"/>
+                    </a:lnR>
+                    <a:lnT w="6350" cap="flat" cmpd="sng" algn="ctr">
+                      <a:solidFill>
+                        <a:srgbClr val="CBD5E0"/>
+                      </a:solidFill>
+                      <a:prstDash val="solid"/>
+                      <a:round/>
+                      <a:headEnd type="none" w="med" len="med"/>
+                      <a:tailEnd type="none" w="med" len="med"/>
+                    </a:lnT>
+                    <a:lnB w="6350" cap="flat" cmpd="sng" algn="ctr">
+                      <a:solidFill>
+                        <a:srgbClr val="CBD5E0"/>
+                      </a:solidFill>
+                      <a:prstDash val="solid"/>
+                      <a:round/>
+                      <a:headEnd type="none" w="med" len="med"/>
+                      <a:tailEnd type="none" w="med" len="med"/>
+                    </a:lnB>
+                  </a:tcPr>
+                </a:tc>
+                <a:extLst>
+                  <a:ext uri="{0D108BD9-81ED-4DB2-BD59-A6C34878D82A}">
+                    <a16:rowId xmlns:a16="http://schemas.microsoft.com/office/drawing/2014/main" val="1032489358"/>
                   </a:ext>
                 </a:extLst>
               </a:tr>
@@ -6502,7 +6869,7 @@
                           <a:ea typeface="Calibri" pitchFamily="34" charset="-122"/>
                           <a:cs typeface="Calibri" pitchFamily="34" charset="-120"/>
                         </a:rPr>
-                        <a:t>S3</a:t>
+                        <a:t>S5</a:t>
                       </a:r>
                       <a:endParaRPr lang="en-US" sz="1050" dirty="0">
                         <a:latin typeface="Calibri" charset="0"/>
@@ -6567,7 +6934,7 @@
                           <a:ea typeface="Calibri" pitchFamily="34" charset="-122"/>
                           <a:cs typeface="Calibri" pitchFamily="34" charset="-120"/>
                         </a:rPr>
-                        <a:t>S1</a:t>
+                        <a:t>S0</a:t>
                       </a:r>
                       <a:endParaRPr lang="en-US" sz="1050" dirty="0">
                         <a:latin typeface="Calibri" charset="0"/>
@@ -6704,7 +7071,7 @@
                           <a:ea typeface="Calibri" pitchFamily="34" charset="-122"/>
                           <a:cs typeface="Calibri" pitchFamily="34" charset="-120"/>
                         </a:rPr>
-                        <a:t>S4</a:t>
+                        <a:t>S3</a:t>
                       </a:r>
                       <a:endParaRPr lang="en-US" sz="1050" dirty="0">
                         <a:latin typeface="Calibri" charset="0"/>
@@ -6769,7 +7136,7 @@
                           <a:ea typeface="Calibri" pitchFamily="34" charset="-122"/>
                           <a:cs typeface="Calibri" pitchFamily="34" charset="-120"/>
                         </a:rPr>
-                        <a:t>S4</a:t>
+                        <a:t>S6</a:t>
                       </a:r>
                       <a:endParaRPr lang="en-US" sz="1050" dirty="0">
                         <a:latin typeface="Calibri" charset="0"/>
@@ -6834,7 +7201,7 @@
                           <a:ea typeface="Calibri" pitchFamily="34" charset="-122"/>
                           <a:cs typeface="Calibri" pitchFamily="34" charset="-120"/>
                         </a:rPr>
-                        <a:t>S1</a:t>
+                        <a:t>S0</a:t>
                       </a:r>
                       <a:endParaRPr lang="en-US" sz="1050" dirty="0">
                         <a:latin typeface="Calibri" charset="0"/>
@@ -6959,19 +7326,156 @@
                     <a:bodyPr/>
                     <a:lstStyle/>
                     <a:p>
-                      <a:pPr marL="0" indent="0">
+                      <a:pPr marL="0" marR="0" lvl="0" indent="0" algn="l" defTabSz="914400" rtl="0" eaLnBrk="1" fontAlgn="auto" latinLnBrk="0" hangingPunct="1">
+                        <a:lnSpc>
+                          <a:spcPct val="100000"/>
+                        </a:lnSpc>
+                        <a:spcBef>
+                          <a:spcPts val="0"/>
+                        </a:spcBef>
+                        <a:spcAft>
+                          <a:spcPts val="0"/>
+                        </a:spcAft>
+                        <a:buClrTx/>
+                        <a:buSzTx/>
+                        <a:buFontTx/>
                         <a:buNone/>
+                        <a:tabLst/>
+                        <a:defRPr/>
                       </a:pPr>
                       <a:r>
-                        <a:rPr lang="en-US" sz="1050" dirty="0">
+                        <a:rPr lang="en-US" sz="1050" b="1" dirty="0">
                           <a:solidFill>
-                            <a:srgbClr val="000000"/>
+                            <a:srgbClr val="CC0000"/>
                           </a:solidFill>
                           <a:latin typeface="Calibri" pitchFamily="34" charset="0"/>
                           <a:ea typeface="Calibri" pitchFamily="34" charset="-122"/>
                           <a:cs typeface="Calibri" pitchFamily="34" charset="-120"/>
                         </a:rPr>
-                        <a:t>S4</a:t>
+                        <a:t>&lt;&gt;  ← </a:t>
+                      </a:r>
+                      <a:r>
+                        <a:rPr lang="en-US" sz="1050" b="1" dirty="0" err="1">
+                          <a:solidFill>
+                            <a:srgbClr val="CC0000"/>
+                          </a:solidFill>
+                          <a:latin typeface="Calibri" pitchFamily="34" charset="0"/>
+                          <a:ea typeface="Calibri" pitchFamily="34" charset="-122"/>
+                          <a:cs typeface="Calibri" pitchFamily="34" charset="-120"/>
+                        </a:rPr>
+                        <a:t>ห้าม</a:t>
+                      </a:r>
+                      <a:r>
+                        <a:rPr lang="en-US" sz="1050" b="1" dirty="0">
+                          <a:solidFill>
+                            <a:srgbClr val="CC0000"/>
+                          </a:solidFill>
+                          <a:latin typeface="Calibri" pitchFamily="34" charset="0"/>
+                          <a:ea typeface="Calibri" pitchFamily="34" charset="-122"/>
+                          <a:cs typeface="Calibri" pitchFamily="34" charset="-120"/>
+                        </a:rPr>
+                        <a:t>!</a:t>
+                      </a:r>
+                      <a:endParaRPr lang="en-US" sz="1050" dirty="0">
+                        <a:latin typeface="Calibri" charset="0"/>
+                        <a:ea typeface="Calibri" charset="0"/>
+                        <a:cs typeface="Calibri" charset="0"/>
+                      </a:endParaRPr>
+                    </a:p>
+                  </a:txBody>
+                  <a:tcPr>
+                    <a:lnL w="6350" cap="flat" cmpd="sng" algn="ctr">
+                      <a:solidFill>
+                        <a:srgbClr val="CBD5E0"/>
+                      </a:solidFill>
+                      <a:prstDash val="solid"/>
+                      <a:round/>
+                      <a:headEnd type="none" w="med" len="med"/>
+                      <a:tailEnd type="none" w="med" len="med"/>
+                    </a:lnL>
+                    <a:lnR w="6350" cap="flat" cmpd="sng" algn="ctr">
+                      <a:solidFill>
+                        <a:srgbClr val="CBD5E0"/>
+                      </a:solidFill>
+                      <a:prstDash val="solid"/>
+                      <a:round/>
+                      <a:headEnd type="none" w="med" len="med"/>
+                      <a:tailEnd type="none" w="med" len="med"/>
+                    </a:lnR>
+                    <a:lnT w="6350" cap="flat" cmpd="sng" algn="ctr">
+                      <a:solidFill>
+                        <a:srgbClr val="CBD5E0"/>
+                      </a:solidFill>
+                      <a:prstDash val="solid"/>
+                      <a:round/>
+                      <a:headEnd type="none" w="med" len="med"/>
+                      <a:tailEnd type="none" w="med" len="med"/>
+                    </a:lnT>
+                    <a:lnB w="6350" cap="flat" cmpd="sng" algn="ctr">
+                      <a:solidFill>
+                        <a:srgbClr val="CBD5E0"/>
+                      </a:solidFill>
+                      <a:prstDash val="solid"/>
+                      <a:round/>
+                      <a:headEnd type="none" w="med" len="med"/>
+                      <a:tailEnd type="none" w="med" len="med"/>
+                    </a:lnB>
+                  </a:tcPr>
+                </a:tc>
+                <a:tc>
+                  <a:txBody>
+                    <a:bodyPr/>
+                    <a:lstStyle/>
+                    <a:p>
+                      <a:pPr marL="0" marR="0" lvl="0" indent="0" algn="l" defTabSz="914400" rtl="0" eaLnBrk="1" fontAlgn="auto" latinLnBrk="0" hangingPunct="1">
+                        <a:lnSpc>
+                          <a:spcPct val="100000"/>
+                        </a:lnSpc>
+                        <a:spcBef>
+                          <a:spcPts val="0"/>
+                        </a:spcBef>
+                        <a:spcAft>
+                          <a:spcPts val="0"/>
+                        </a:spcAft>
+                        <a:buClrTx/>
+                        <a:buSzTx/>
+                        <a:buFontTx/>
+                        <a:buNone/>
+                        <a:tabLst/>
+                        <a:defRPr/>
+                      </a:pPr>
+                      <a:r>
+                        <a:rPr lang="en-US" sz="1050" b="1" dirty="0">
+                          <a:solidFill>
+                            <a:srgbClr val="CC0000"/>
+                          </a:solidFill>
+                          <a:latin typeface="Calibri" pitchFamily="34" charset="0"/>
+                          <a:ea typeface="Calibri" pitchFamily="34" charset="-122"/>
+                          <a:cs typeface="Calibri" pitchFamily="34" charset="-120"/>
+                        </a:rPr>
+                        <a:t>&lt;&gt;  ← </a:t>
+                      </a:r>
+                      <a:r>
+                        <a:rPr lang="en-US" sz="1050" b="1" dirty="0" err="1">
+                          <a:solidFill>
+                            <a:srgbClr val="CC0000"/>
+                          </a:solidFill>
+                          <a:latin typeface="Calibri" pitchFamily="34" charset="0"/>
+                          <a:ea typeface="Calibri" pitchFamily="34" charset="-122"/>
+                          <a:cs typeface="Calibri" pitchFamily="34" charset="-120"/>
+                        </a:rPr>
+                        <a:t>ห้าม</a:t>
+                      </a:r>
+                      <a:r>
+                        <a:rPr lang="en-US" sz="1050" b="1" dirty="0">
+                          <a:solidFill>
+                            <a:srgbClr val="CC0000"/>
+                          </a:solidFill>
+                          <a:latin typeface="Calibri" pitchFamily="34" charset="0"/>
+                          <a:ea typeface="Calibri" pitchFamily="34" charset="-122"/>
+                          <a:cs typeface="Calibri" pitchFamily="34" charset="-120"/>
+                        </a:rPr>
+                        <a:t>!</a:t>
                       </a:r>
                       <a:endParaRPr lang="en-US" sz="1050" dirty="0">
                         <a:latin typeface="Calibri" charset="0"/>
@@ -7036,72 +7540,7 @@
                           <a:ea typeface="Calibri" pitchFamily="34" charset="-122"/>
                           <a:cs typeface="Calibri" pitchFamily="34" charset="-120"/>
                         </a:rPr>
-                        <a:t>S5</a:t>
-                      </a:r>
-                      <a:endParaRPr lang="en-US" sz="1050" dirty="0">
-                        <a:latin typeface="Calibri" charset="0"/>
-                        <a:ea typeface="Calibri" charset="0"/>
-                        <a:cs typeface="Calibri" charset="0"/>
-                      </a:endParaRPr>
-                    </a:p>
-                  </a:txBody>
-                  <a:tcPr>
-                    <a:lnL w="6350" cap="flat" cmpd="sng" algn="ctr">
-                      <a:solidFill>
-                        <a:srgbClr val="CBD5E0"/>
-                      </a:solidFill>
-                      <a:prstDash val="solid"/>
-                      <a:round/>
-                      <a:headEnd type="none" w="med" len="med"/>
-                      <a:tailEnd type="none" w="med" len="med"/>
-                    </a:lnL>
-                    <a:lnR w="6350" cap="flat" cmpd="sng" algn="ctr">
-                      <a:solidFill>
-                        <a:srgbClr val="CBD5E0"/>
-                      </a:solidFill>
-                      <a:prstDash val="solid"/>
-                      <a:round/>
-                      <a:headEnd type="none" w="med" len="med"/>
-                      <a:tailEnd type="none" w="med" len="med"/>
-                    </a:lnR>
-                    <a:lnT w="6350" cap="flat" cmpd="sng" algn="ctr">
-                      <a:solidFill>
-                        <a:srgbClr val="CBD5E0"/>
-                      </a:solidFill>
-                      <a:prstDash val="solid"/>
-                      <a:round/>
-                      <a:headEnd type="none" w="med" len="med"/>
-                      <a:tailEnd type="none" w="med" len="med"/>
-                    </a:lnT>
-                    <a:lnB w="6350" cap="flat" cmpd="sng" algn="ctr">
-                      <a:solidFill>
-                        <a:srgbClr val="CBD5E0"/>
-                      </a:solidFill>
-                      <a:prstDash val="solid"/>
-                      <a:round/>
-                      <a:headEnd type="none" w="med" len="med"/>
-                      <a:tailEnd type="none" w="med" len="med"/>
-                    </a:lnB>
-                  </a:tcPr>
-                </a:tc>
-                <a:tc>
-                  <a:txBody>
-                    <a:bodyPr/>
-                    <a:lstStyle/>
-                    <a:p>
-                      <a:pPr marL="0" indent="0">
-                        <a:buNone/>
-                      </a:pPr>
-                      <a:r>
-                        <a:rPr lang="en-US" sz="1050" dirty="0">
-                          <a:solidFill>
-                            <a:srgbClr val="000000"/>
-                          </a:solidFill>
-                          <a:latin typeface="Calibri" pitchFamily="34" charset="0"/>
-                          <a:ea typeface="Calibri" pitchFamily="34" charset="-122"/>
-                          <a:cs typeface="Calibri" pitchFamily="34" charset="-120"/>
-                        </a:rPr>
-                        <a:t>S1</a:t>
+                        <a:t>S0</a:t>
                       </a:r>
                       <a:endParaRPr lang="en-US" sz="1050" dirty="0">
                         <a:latin typeface="Calibri" charset="0"/>
@@ -7238,7 +7677,108 @@
                           <a:ea typeface="Calibri" pitchFamily="34" charset="-122"/>
                           <a:cs typeface="Calibri" pitchFamily="34" charset="-120"/>
                         </a:rPr>
-                        <a:t>S6</a:t>
+                        <a:t>S2</a:t>
+                      </a:r>
+                      <a:endParaRPr lang="en-US" sz="1050" dirty="0">
+                        <a:latin typeface="Calibri" charset="0"/>
+                        <a:ea typeface="Calibri" charset="0"/>
+                        <a:cs typeface="Calibri" charset="0"/>
+                      </a:endParaRPr>
+                    </a:p>
+                  </a:txBody>
+                  <a:tcPr>
+                    <a:lnL w="6350" cap="flat" cmpd="sng" algn="ctr">
+                      <a:solidFill>
+                        <a:srgbClr val="CBD5E0"/>
+                      </a:solidFill>
+                      <a:prstDash val="solid"/>
+                      <a:round/>
+                      <a:headEnd type="none" w="med" len="med"/>
+                      <a:tailEnd type="none" w="med" len="med"/>
+                    </a:lnL>
+                    <a:lnR w="6350" cap="flat" cmpd="sng" algn="ctr">
+                      <a:solidFill>
+                        <a:srgbClr val="CBD5E0"/>
+                      </a:solidFill>
+                      <a:prstDash val="solid"/>
+                      <a:round/>
+                      <a:headEnd type="none" w="med" len="med"/>
+                      <a:tailEnd type="none" w="med" len="med"/>
+                    </a:lnR>
+                    <a:lnT w="6350" cap="flat" cmpd="sng" algn="ctr">
+                      <a:solidFill>
+                        <a:srgbClr val="CBD5E0"/>
+                      </a:solidFill>
+                      <a:prstDash val="solid"/>
+                      <a:round/>
+                      <a:headEnd type="none" w="med" len="med"/>
+                      <a:tailEnd type="none" w="med" len="med"/>
+                    </a:lnT>
+                    <a:lnB w="6350" cap="flat" cmpd="sng" algn="ctr">
+                      <a:solidFill>
+                        <a:srgbClr val="CBD5E0"/>
+                      </a:solidFill>
+                      <a:prstDash val="solid"/>
+                      <a:round/>
+                      <a:headEnd type="none" w="med" len="med"/>
+                      <a:tailEnd type="none" w="med" len="med"/>
+                    </a:lnB>
+                  </a:tcPr>
+                </a:tc>
+                <a:tc>
+                  <a:txBody>
+                    <a:bodyPr/>
+                    <a:lstStyle/>
+                    <a:p>
+                      <a:pPr marL="0" marR="0" lvl="0" indent="0" algn="l" defTabSz="914400" rtl="0" eaLnBrk="1" fontAlgn="auto" latinLnBrk="0" hangingPunct="1">
+                        <a:lnSpc>
+                          <a:spcPct val="100000"/>
+                        </a:lnSpc>
+                        <a:spcBef>
+                          <a:spcPts val="0"/>
+                        </a:spcBef>
+                        <a:spcAft>
+                          <a:spcPts val="0"/>
+                        </a:spcAft>
+                        <a:buClrTx/>
+                        <a:buSzTx/>
+                        <a:buFontTx/>
+                        <a:buNone/>
+                        <a:tabLst/>
+                        <a:defRPr/>
+                      </a:pPr>
+                      <a:r>
+                        <a:rPr lang="en-US" sz="1050" b="1" dirty="0">
+                          <a:solidFill>
+                            <a:srgbClr val="CC0000"/>
+                          </a:solidFill>
+                          <a:latin typeface="Calibri" pitchFamily="34" charset="0"/>
+                          <a:ea typeface="Calibri" pitchFamily="34" charset="-122"/>
+                          <a:cs typeface="Calibri" pitchFamily="34" charset="-120"/>
+                        </a:rPr>
+                        <a:t>&lt;&gt;  ← </a:t>
+                      </a:r>
+                      <a:r>
+                        <a:rPr lang="en-US" sz="1050" b="1" dirty="0" err="1">
+                          <a:solidFill>
+                            <a:srgbClr val="CC0000"/>
+                          </a:solidFill>
+                          <a:latin typeface="Calibri" pitchFamily="34" charset="0"/>
+                          <a:ea typeface="Calibri" pitchFamily="34" charset="-122"/>
+                          <a:cs typeface="Calibri" pitchFamily="34" charset="-120"/>
+                        </a:rPr>
+                        <a:t>ห้าม</a:t>
+                      </a:r>
+                      <a:r>
+                        <a:rPr lang="en-US" sz="1050" b="1" dirty="0">
+                          <a:solidFill>
+                            <a:srgbClr val="CC0000"/>
+                          </a:solidFill>
+                          <a:latin typeface="Calibri" pitchFamily="34" charset="0"/>
+                          <a:ea typeface="Calibri" pitchFamily="34" charset="-122"/>
+                          <a:cs typeface="Calibri" pitchFamily="34" charset="-120"/>
+                        </a:rPr>
+                        <a:t>!</a:t>
                       </a:r>
                       <a:endParaRPr lang="en-US" sz="1050" dirty="0">
                         <a:latin typeface="Calibri" charset="0"/>
@@ -7303,72 +7843,7 @@
                           <a:ea typeface="Calibri" pitchFamily="34" charset="-122"/>
                           <a:cs typeface="Calibri" pitchFamily="34" charset="-120"/>
                         </a:rPr>
-                        <a:t>S6</a:t>
-                      </a:r>
-                      <a:endParaRPr lang="en-US" sz="1050" dirty="0">
-                        <a:latin typeface="Calibri" charset="0"/>
-                        <a:ea typeface="Calibri" charset="0"/>
-                        <a:cs typeface="Calibri" charset="0"/>
-                      </a:endParaRPr>
-                    </a:p>
-                  </a:txBody>
-                  <a:tcPr>
-                    <a:lnL w="6350" cap="flat" cmpd="sng" algn="ctr">
-                      <a:solidFill>
-                        <a:srgbClr val="CBD5E0"/>
-                      </a:solidFill>
-                      <a:prstDash val="solid"/>
-                      <a:round/>
-                      <a:headEnd type="none" w="med" len="med"/>
-                      <a:tailEnd type="none" w="med" len="med"/>
-                    </a:lnL>
-                    <a:lnR w="6350" cap="flat" cmpd="sng" algn="ctr">
-                      <a:solidFill>
-                        <a:srgbClr val="CBD5E0"/>
-                      </a:solidFill>
-                      <a:prstDash val="solid"/>
-                      <a:round/>
-                      <a:headEnd type="none" w="med" len="med"/>
-                      <a:tailEnd type="none" w="med" len="med"/>
-                    </a:lnR>
-                    <a:lnT w="6350" cap="flat" cmpd="sng" algn="ctr">
-                      <a:solidFill>
-                        <a:srgbClr val="CBD5E0"/>
-                      </a:solidFill>
-                      <a:prstDash val="solid"/>
-                      <a:round/>
-                      <a:headEnd type="none" w="med" len="med"/>
-                      <a:tailEnd type="none" w="med" len="med"/>
-                    </a:lnT>
-                    <a:lnB w="6350" cap="flat" cmpd="sng" algn="ctr">
-                      <a:solidFill>
-                        <a:srgbClr val="CBD5E0"/>
-                      </a:solidFill>
-                      <a:prstDash val="solid"/>
-                      <a:round/>
-                      <a:headEnd type="none" w="med" len="med"/>
-                      <a:tailEnd type="none" w="med" len="med"/>
-                    </a:lnB>
-                  </a:tcPr>
-                </a:tc>
-                <a:tc>
-                  <a:txBody>
-                    <a:bodyPr/>
-                    <a:lstStyle/>
-                    <a:p>
-                      <a:pPr marL="0" indent="0">
-                        <a:buNone/>
-                      </a:pPr>
-                      <a:r>
-                        <a:rPr lang="en-US" sz="1050" dirty="0">
-                          <a:solidFill>
-                            <a:srgbClr val="000000"/>
-                          </a:solidFill>
-                          <a:latin typeface="Calibri" pitchFamily="34" charset="0"/>
-                          <a:ea typeface="Calibri" pitchFamily="34" charset="-122"/>
-                          <a:cs typeface="Calibri" pitchFamily="34" charset="-120"/>
-                        </a:rPr>
-                        <a:t>S1</a:t>
+                        <a:t>S0</a:t>
                       </a:r>
                       <a:endParaRPr lang="en-US" sz="1050" dirty="0">
                         <a:latin typeface="Calibri" charset="0"/>
@@ -7505,7 +7980,7 @@
                           <a:ea typeface="Calibri" pitchFamily="34" charset="-122"/>
                           <a:cs typeface="Calibri" pitchFamily="34" charset="-120"/>
                         </a:rPr>
-                        <a:t>S6</a:t>
+                        <a:t>S3</a:t>
                       </a:r>
                       <a:endParaRPr lang="en-US" sz="1050" dirty="0">
                         <a:latin typeface="Calibri" charset="0"/>
@@ -7635,7 +8110,7 @@
                           <a:ea typeface="Calibri" pitchFamily="34" charset="-122"/>
                           <a:cs typeface="Calibri" pitchFamily="34" charset="-120"/>
                         </a:rPr>
-                        <a:t>S1</a:t>
+                        <a:t>S0</a:t>
                       </a:r>
                       <a:endParaRPr lang="en-US" sz="1050" dirty="0">
                         <a:latin typeface="Calibri" charset="0"/>
@@ -7700,14 +8175,107 @@
                       </a:pPr>
                       <a:r>
                         <a:rPr lang="en-US" sz="1050" dirty="0">
+                          <a:latin typeface="Calibri" charset="0"/>
+                          <a:ea typeface="Calibri" charset="0"/>
+                          <a:cs typeface="Calibri" charset="0"/>
+                        </a:rPr>
+                        <a:t>S6</a:t>
+                      </a:r>
+                    </a:p>
+                  </a:txBody>
+                  <a:tcPr>
+                    <a:lnL w="6350" cap="flat" cmpd="sng" algn="ctr">
+                      <a:solidFill>
+                        <a:srgbClr val="CBD5E0"/>
+                      </a:solidFill>
+                      <a:prstDash val="solid"/>
+                      <a:round/>
+                      <a:headEnd type="none" w="med" len="med"/>
+                      <a:tailEnd type="none" w="med" len="med"/>
+                    </a:lnL>
+                    <a:lnR w="6350" cap="flat" cmpd="sng" algn="ctr">
+                      <a:solidFill>
+                        <a:srgbClr val="CBD5E0"/>
+                      </a:solidFill>
+                      <a:prstDash val="solid"/>
+                      <a:round/>
+                      <a:headEnd type="none" w="med" len="med"/>
+                      <a:tailEnd type="none" w="med" len="med"/>
+                    </a:lnR>
+                    <a:lnT w="6350" cap="flat" cmpd="sng" algn="ctr">
+                      <a:solidFill>
+                        <a:srgbClr val="CBD5E0"/>
+                      </a:solidFill>
+                      <a:prstDash val="solid"/>
+                      <a:round/>
+                      <a:headEnd type="none" w="med" len="med"/>
+                      <a:tailEnd type="none" w="med" len="med"/>
+                    </a:lnT>
+                    <a:lnB w="6350" cap="flat" cmpd="sng" algn="ctr">
+                      <a:solidFill>
+                        <a:srgbClr val="CBD5E0"/>
+                      </a:solidFill>
+                      <a:prstDash val="solid"/>
+                      <a:round/>
+                      <a:headEnd type="none" w="med" len="med"/>
+                      <a:tailEnd type="none" w="med" len="med"/>
+                    </a:lnB>
+                  </a:tcPr>
+                </a:tc>
+                <a:tc>
+                  <a:txBody>
+                    <a:bodyPr/>
+                    <a:lstStyle/>
+                    <a:p>
+                      <a:pPr marL="0" marR="0" lvl="0" indent="0" algn="l" defTabSz="914400" rtl="0" eaLnBrk="1" fontAlgn="auto" latinLnBrk="0" hangingPunct="1">
+                        <a:lnSpc>
+                          <a:spcPct val="100000"/>
+                        </a:lnSpc>
+                        <a:spcBef>
+                          <a:spcPts val="0"/>
+                        </a:spcBef>
+                        <a:spcAft>
+                          <a:spcPts val="0"/>
+                        </a:spcAft>
+                        <a:buClrTx/>
+                        <a:buSzTx/>
+                        <a:buFontTx/>
+                        <a:buNone/>
+                        <a:tabLst/>
+                        <a:defRPr/>
+                      </a:pPr>
+                      <a:r>
+                        <a:rPr lang="en-US" sz="1050" b="1" dirty="0">
                           <a:solidFill>
-                            <a:srgbClr val="000000"/>
+                            <a:srgbClr val="CC0000"/>
                           </a:solidFill>
                           <a:latin typeface="Calibri" pitchFamily="34" charset="0"/>
                           <a:ea typeface="Calibri" pitchFamily="34" charset="-122"/>
                           <a:cs typeface="Calibri" pitchFamily="34" charset="-120"/>
                         </a:rPr>
-                        <a:t>S6</a:t>
+                        <a:t>&lt;&gt;  ← </a:t>
+                      </a:r>
+                      <a:r>
+                        <a:rPr lang="en-US" sz="1050" b="1" dirty="0" err="1">
+                          <a:solidFill>
+                            <a:srgbClr val="CC0000"/>
+                          </a:solidFill>
+                          <a:latin typeface="Calibri" pitchFamily="34" charset="0"/>
+                          <a:ea typeface="Calibri" pitchFamily="34" charset="-122"/>
+                          <a:cs typeface="Calibri" pitchFamily="34" charset="-120"/>
+                        </a:rPr>
+                        <a:t>ห้าม</a:t>
+                      </a:r>
+                      <a:r>
+                        <a:rPr lang="en-US" sz="1050" b="1" dirty="0">
+                          <a:solidFill>
+                            <a:srgbClr val="CC0000"/>
+                          </a:solidFill>
+                          <a:latin typeface="Calibri" pitchFamily="34" charset="0"/>
+                          <a:ea typeface="Calibri" pitchFamily="34" charset="-122"/>
+                          <a:cs typeface="Calibri" pitchFamily="34" charset="-120"/>
+                        </a:rPr>
+                        <a:t>!</a:t>
                       </a:r>
                       <a:endParaRPr lang="en-US" sz="1050" dirty="0">
                         <a:latin typeface="Calibri" charset="0"/>
@@ -7760,8 +8328,22 @@
                     <a:bodyPr/>
                     <a:lstStyle/>
                     <a:p>
-                      <a:pPr marL="0" indent="0">
+                      <a:pPr marL="0" marR="0" lvl="0" indent="0" algn="l" defTabSz="914400" rtl="0" eaLnBrk="1" fontAlgn="auto" latinLnBrk="0" hangingPunct="1">
+                        <a:lnSpc>
+                          <a:spcPct val="100000"/>
+                        </a:lnSpc>
+                        <a:spcBef>
+                          <a:spcPts val="0"/>
+                        </a:spcBef>
+                        <a:spcAft>
+                          <a:spcPts val="0"/>
+                        </a:spcAft>
+                        <a:buClrTx/>
+                        <a:buSzTx/>
+                        <a:buFontTx/>
                         <a:buNone/>
+                        <a:tabLst/>
+                        <a:defRPr/>
                       </a:pPr>
                       <a:r>
                         <a:rPr lang="en-US" sz="1050" b="1" dirty="0">
@@ -7772,62 +8354,19 @@
                           <a:ea typeface="Calibri" pitchFamily="34" charset="-122"/>
                           <a:cs typeface="Calibri" pitchFamily="34" charset="-120"/>
                         </a:rPr>
-                        <a:t>&lt;&gt;  ← ห้าม!</a:t>
+                        <a:t>&lt;&gt;  ← </a:t>
                       </a:r>
-                      <a:endParaRPr lang="en-US" sz="1050" dirty="0">
-                        <a:latin typeface="Calibri" charset="0"/>
-                        <a:ea typeface="Calibri" charset="0"/>
-                        <a:cs typeface="Calibri" charset="0"/>
-                      </a:endParaRPr>
-                    </a:p>
-                  </a:txBody>
-                  <a:tcPr>
-                    <a:lnL w="6350" cap="flat" cmpd="sng" algn="ctr">
-                      <a:solidFill>
-                        <a:srgbClr val="CBD5E0"/>
-                      </a:solidFill>
-                      <a:prstDash val="solid"/>
-                      <a:round/>
-                      <a:headEnd type="none" w="med" len="med"/>
-                      <a:tailEnd type="none" w="med" len="med"/>
-                    </a:lnL>
-                    <a:lnR w="6350" cap="flat" cmpd="sng" algn="ctr">
-                      <a:solidFill>
-                        <a:srgbClr val="CBD5E0"/>
-                      </a:solidFill>
-                      <a:prstDash val="solid"/>
-                      <a:round/>
-                      <a:headEnd type="none" w="med" len="med"/>
-                      <a:tailEnd type="none" w="med" len="med"/>
-                    </a:lnR>
-                    <a:lnT w="6350" cap="flat" cmpd="sng" algn="ctr">
-                      <a:solidFill>
-                        <a:srgbClr val="CBD5E0"/>
-                      </a:solidFill>
-                      <a:prstDash val="solid"/>
-                      <a:round/>
-                      <a:headEnd type="none" w="med" len="med"/>
-                      <a:tailEnd type="none" w="med" len="med"/>
-                    </a:lnT>
-                    <a:lnB w="6350" cap="flat" cmpd="sng" algn="ctr">
-                      <a:solidFill>
-                        <a:srgbClr val="CBD5E0"/>
-                      </a:solidFill>
-                      <a:prstDash val="solid"/>
-                      <a:round/>
-                      <a:headEnd type="none" w="med" len="med"/>
-                      <a:tailEnd type="none" w="med" len="med"/>
-                    </a:lnB>
-                  </a:tcPr>
-                </a:tc>
-                <a:tc>
-                  <a:txBody>
-                    <a:bodyPr/>
-                    <a:lstStyle/>
-                    <a:p>
-                      <a:pPr marL="0" indent="0">
-                        <a:buNone/>
-                      </a:pPr>
+                      <a:r>
+                        <a:rPr lang="en-US" sz="1050" b="1" dirty="0" err="1">
+                          <a:solidFill>
+                            <a:srgbClr val="CC0000"/>
+                          </a:solidFill>
+                          <a:latin typeface="Calibri" pitchFamily="34" charset="0"/>
+                          <a:ea typeface="Calibri" pitchFamily="34" charset="-122"/>
+                          <a:cs typeface="Calibri" pitchFamily="34" charset="-120"/>
+                        </a:rPr>
+                        <a:t>ห้าม</a:t>
+                      </a:r>
                       <a:r>
                         <a:rPr lang="en-US" sz="1050" b="1" dirty="0">
                           <a:solidFill>
@@ -7837,7 +8376,7 @@
                           <a:ea typeface="Calibri" pitchFamily="34" charset="-122"/>
                           <a:cs typeface="Calibri" pitchFamily="34" charset="-120"/>
                         </a:rPr>
-                        <a:t>&lt;&gt;  ← ห้าม!</a:t>
+                        <a:t>!</a:t>
                       </a:r>
                       <a:endParaRPr lang="en-US" sz="1050" dirty="0">
                         <a:latin typeface="Calibri" charset="0"/>
@@ -7895,20 +8434,12 @@
                       </a:pPr>
                       <a:r>
                         <a:rPr lang="en-US" sz="1050" dirty="0">
-                          <a:solidFill>
-                            <a:srgbClr val="000000"/>
-                          </a:solidFill>
-                          <a:latin typeface="Calibri" pitchFamily="34" charset="0"/>
-                          <a:ea typeface="Calibri" pitchFamily="34" charset="-122"/>
-                          <a:cs typeface="Calibri" pitchFamily="34" charset="-120"/>
+                          <a:latin typeface="Calibri" charset="0"/>
+                          <a:ea typeface="Calibri" charset="0"/>
+                          <a:cs typeface="Calibri" charset="0"/>
                         </a:rPr>
-                        <a:t>S1</a:t>
+                        <a:t>S0</a:t>
                       </a:r>
-                      <a:endParaRPr lang="en-US" sz="1050" dirty="0">
-                        <a:latin typeface="Calibri" charset="0"/>
-                        <a:ea typeface="Calibri" charset="0"/>
-                        <a:cs typeface="Calibri" charset="0"/>
-                      </a:endParaRPr>
                     </a:p>
                   </a:txBody>
                   <a:tcPr>
@@ -7968,7 +8499,7 @@
         </p:nvSpPr>
         <p:spPr>
           <a:xfrm>
-            <a:off x="365760" y="4846320"/>
+            <a:off x="365760" y="4588623"/>
             <a:ext cx="7315200" cy="228600"/>
           </a:xfrm>
           <a:prstGeom prst="rect">
@@ -7982,6 +8513,34 @@
           <a:lstStyle/>
           <a:p>
             <a:pPr marL="0" indent="0">
+              <a:buNone/>
+            </a:pPr>
+            <a:endParaRPr lang="en-US" sz="900" dirty="0"/>
+          </a:p>
+        </p:txBody>
+      </p:sp>
+      <p:sp>
+        <p:nvSpPr>
+          <p:cNvPr id="27" name="Text 24"/>
+          <p:cNvSpPr/>
+          <p:nvPr/>
+        </p:nvSpPr>
+        <p:spPr>
+          <a:xfrm>
+            <a:off x="8395855" y="4817223"/>
+            <a:ext cx="548640" cy="228600"/>
+          </a:xfrm>
+          <a:prstGeom prst="rect">
+            <a:avLst/>
+          </a:prstGeom>
+          <a:noFill/>
+          <a:ln/>
+        </p:spPr>
+        <p:txBody>
+          <a:bodyPr wrap="square" rtlCol="0" anchor="ctr"/>
+          <a:lstStyle/>
+          <a:p>
+            <a:pPr marL="0" indent="0" algn="r">
               <a:buNone/>
             </a:pPr>
             <a:r>
@@ -7993,48 +8552,750 @@
                 <a:ea typeface="Calibri" pitchFamily="34" charset="-122"/>
                 <a:cs typeface="Calibri" pitchFamily="34" charset="-120"/>
               </a:rPr>
-              <a:t>วันที่ 4: Scheduling เชิงลึก — DFA Design</a:t>
+              <a:t>12 / 21</a:t>
             </a:r>
             <a:endParaRPr lang="en-US" sz="900" dirty="0"/>
           </a:p>
         </p:txBody>
       </p:sp>
-      <p:sp>
-        <p:nvSpPr>
-          <p:cNvPr id="27" name="Text 24"/>
-          <p:cNvSpPr/>
-          <p:nvPr/>
-        </p:nvSpPr>
-        <p:spPr>
-          <a:xfrm>
-            <a:off x="8412480" y="4846320"/>
-            <a:ext cx="548640" cy="228600"/>
+      <p:cxnSp>
+        <p:nvCxnSpPr>
+          <p:cNvPr id="29" name="Straight Arrow Connector 28">
+            <a:extLst>
+              <a:ext uri="{FF2B5EF4-FFF2-40B4-BE49-F238E27FC236}">
+                <a16:creationId xmlns:a16="http://schemas.microsoft.com/office/drawing/2014/main" id="{9B797599-EC19-EB82-E90D-E94CC22015F9}"/>
+              </a:ext>
+            </a:extLst>
+          </p:cNvPr>
+          <p:cNvCxnSpPr>
+            <a:cxnSpLocks/>
+            <a:stCxn id="6" idx="3"/>
+            <a:endCxn id="9" idx="1"/>
+          </p:cNvCxnSpPr>
+          <p:nvPr/>
+        </p:nvCxnSpPr>
+        <p:spPr>
+          <a:xfrm>
+            <a:off x="1645920" y="1689975"/>
+            <a:ext cx="640080" cy="0"/>
+          </a:xfrm>
+          <a:prstGeom prst="straightConnector1">
+            <a:avLst/>
+          </a:prstGeom>
+          <a:ln>
+            <a:tailEnd type="triangle"/>
+          </a:ln>
+        </p:spPr>
+        <p:style>
+          <a:lnRef idx="1">
+            <a:schemeClr val="accent1"/>
+          </a:lnRef>
+          <a:fillRef idx="0">
+            <a:schemeClr val="accent1"/>
+          </a:fillRef>
+          <a:effectRef idx="0">
+            <a:schemeClr val="accent1"/>
+          </a:effectRef>
+          <a:fontRef idx="minor">
+            <a:schemeClr val="tx1"/>
+          </a:fontRef>
+        </p:style>
+      </p:cxnSp>
+      <p:cxnSp>
+        <p:nvCxnSpPr>
+          <p:cNvPr id="33" name="Straight Arrow Connector 32">
+            <a:extLst>
+              <a:ext uri="{FF2B5EF4-FFF2-40B4-BE49-F238E27FC236}">
+                <a16:creationId xmlns:a16="http://schemas.microsoft.com/office/drawing/2014/main" id="{EAD3CDEE-1431-0DB3-7C70-B1EBC15111DD}"/>
+              </a:ext>
+            </a:extLst>
+          </p:cNvPr>
+          <p:cNvCxnSpPr>
+            <a:cxnSpLocks/>
+          </p:cNvCxnSpPr>
+          <p:nvPr/>
+        </p:nvCxnSpPr>
+        <p:spPr>
+          <a:xfrm>
+            <a:off x="3383280" y="1695240"/>
+            <a:ext cx="640080" cy="0"/>
+          </a:xfrm>
+          <a:prstGeom prst="straightConnector1">
+            <a:avLst/>
+          </a:prstGeom>
+          <a:ln>
+            <a:tailEnd type="triangle"/>
+          </a:ln>
+        </p:spPr>
+        <p:style>
+          <a:lnRef idx="1">
+            <a:schemeClr val="accent1"/>
+          </a:lnRef>
+          <a:fillRef idx="0">
+            <a:schemeClr val="accent1"/>
+          </a:fillRef>
+          <a:effectRef idx="0">
+            <a:schemeClr val="accent1"/>
+          </a:effectRef>
+          <a:fontRef idx="minor">
+            <a:schemeClr val="tx1"/>
+          </a:fontRef>
+        </p:style>
+      </p:cxnSp>
+      <p:sp>
+        <p:nvSpPr>
+          <p:cNvPr id="34" name="TextBox 33">
+            <a:extLst>
+              <a:ext uri="{FF2B5EF4-FFF2-40B4-BE49-F238E27FC236}">
+                <a16:creationId xmlns:a16="http://schemas.microsoft.com/office/drawing/2014/main" id="{06B1085D-3484-7180-A4BA-0A2A8A33241C}"/>
+              </a:ext>
+            </a:extLst>
+          </p:cNvPr>
+          <p:cNvSpPr txBox="1"/>
+          <p:nvPr/>
+        </p:nvSpPr>
+        <p:spPr>
+          <a:xfrm>
+            <a:off x="1857894" y="1365678"/>
+            <a:ext cx="216131" cy="369332"/>
           </a:xfrm>
           <a:prstGeom prst="rect">
             <a:avLst/>
           </a:prstGeom>
           <a:noFill/>
+        </p:spPr>
+        <p:txBody>
+          <a:bodyPr wrap="square" rtlCol="0">
+            <a:spAutoFit/>
+          </a:bodyPr>
+          <a:lstStyle/>
+          <a:p>
+            <a:r>
+              <a:rPr lang="en-TH" dirty="0"/>
+              <a:t>D</a:t>
+            </a:r>
+          </a:p>
+        </p:txBody>
+      </p:sp>
+      <p:sp>
+        <p:nvSpPr>
+          <p:cNvPr id="35" name="TextBox 34">
+            <a:extLst>
+              <a:ext uri="{FF2B5EF4-FFF2-40B4-BE49-F238E27FC236}">
+                <a16:creationId xmlns:a16="http://schemas.microsoft.com/office/drawing/2014/main" id="{B490B918-7376-69D5-4215-4519D0AEA297}"/>
+              </a:ext>
+            </a:extLst>
+          </p:cNvPr>
+          <p:cNvSpPr txBox="1"/>
+          <p:nvPr/>
+        </p:nvSpPr>
+        <p:spPr>
+          <a:xfrm>
+            <a:off x="3541221" y="1357219"/>
+            <a:ext cx="216131" cy="369332"/>
+          </a:xfrm>
+          <a:prstGeom prst="rect">
+            <a:avLst/>
+          </a:prstGeom>
+          <a:noFill/>
+        </p:spPr>
+        <p:txBody>
+          <a:bodyPr wrap="square" rtlCol="0">
+            <a:spAutoFit/>
+          </a:bodyPr>
+          <a:lstStyle/>
+          <a:p>
+            <a:r>
+              <a:rPr lang="en-TH" dirty="0"/>
+              <a:t>D</a:t>
+            </a:r>
+          </a:p>
+        </p:txBody>
+      </p:sp>
+      <p:cxnSp>
+        <p:nvCxnSpPr>
+          <p:cNvPr id="36" name="Straight Arrow Connector 35">
+            <a:extLst>
+              <a:ext uri="{FF2B5EF4-FFF2-40B4-BE49-F238E27FC236}">
+                <a16:creationId xmlns:a16="http://schemas.microsoft.com/office/drawing/2014/main" id="{3B131F4E-EFDD-B41D-A192-68C98F52BC26}"/>
+              </a:ext>
+            </a:extLst>
+          </p:cNvPr>
+          <p:cNvCxnSpPr>
+            <a:cxnSpLocks/>
+          </p:cNvCxnSpPr>
+          <p:nvPr/>
+        </p:nvCxnSpPr>
+        <p:spPr>
+          <a:xfrm>
+            <a:off x="5120641" y="1719511"/>
+            <a:ext cx="640080" cy="0"/>
+          </a:xfrm>
+          <a:prstGeom prst="straightConnector1">
+            <a:avLst/>
+          </a:prstGeom>
+          <a:ln>
+            <a:tailEnd type="triangle"/>
+          </a:ln>
+        </p:spPr>
+        <p:style>
+          <a:lnRef idx="1">
+            <a:schemeClr val="accent1"/>
+          </a:lnRef>
+          <a:fillRef idx="0">
+            <a:schemeClr val="accent1"/>
+          </a:fillRef>
+          <a:effectRef idx="0">
+            <a:schemeClr val="accent1"/>
+          </a:effectRef>
+          <a:fontRef idx="minor">
+            <a:schemeClr val="tx1"/>
+          </a:fontRef>
+        </p:style>
+      </p:cxnSp>
+      <p:sp>
+        <p:nvSpPr>
+          <p:cNvPr id="37" name="TextBox 36">
+            <a:extLst>
+              <a:ext uri="{FF2B5EF4-FFF2-40B4-BE49-F238E27FC236}">
+                <a16:creationId xmlns:a16="http://schemas.microsoft.com/office/drawing/2014/main" id="{07380F17-1166-0B7C-31B4-E60B0E5B259F}"/>
+              </a:ext>
+            </a:extLst>
+          </p:cNvPr>
+          <p:cNvSpPr txBox="1"/>
+          <p:nvPr/>
+        </p:nvSpPr>
+        <p:spPr>
+          <a:xfrm>
+            <a:off x="5278582" y="1381490"/>
+            <a:ext cx="216131" cy="369332"/>
+          </a:xfrm>
+          <a:prstGeom prst="rect">
+            <a:avLst/>
+          </a:prstGeom>
+          <a:noFill/>
+        </p:spPr>
+        <p:txBody>
+          <a:bodyPr wrap="square" rtlCol="0">
+            <a:spAutoFit/>
+          </a:bodyPr>
+          <a:lstStyle/>
+          <a:p>
+            <a:r>
+              <a:rPr lang="en-TH" dirty="0"/>
+              <a:t>D</a:t>
+            </a:r>
+          </a:p>
+        </p:txBody>
+      </p:sp>
+      <p:sp>
+        <p:nvSpPr>
+          <p:cNvPr id="38" name="Shape 7">
+            <a:extLst>
+              <a:ext uri="{FF2B5EF4-FFF2-40B4-BE49-F238E27FC236}">
+                <a16:creationId xmlns:a16="http://schemas.microsoft.com/office/drawing/2014/main" id="{F605E93A-B677-C09B-4A40-39DDB68F2A5B}"/>
+              </a:ext>
+            </a:extLst>
+          </p:cNvPr>
+          <p:cNvSpPr/>
+          <p:nvPr/>
+        </p:nvSpPr>
+        <p:spPr>
+          <a:xfrm>
+            <a:off x="2286000" y="2174607"/>
+            <a:ext cx="1097280" cy="566928"/>
+          </a:xfrm>
+          <a:prstGeom prst="rect">
+            <a:avLst/>
+          </a:prstGeom>
+          <a:solidFill>
+            <a:srgbClr val="1A3C5E"/>
+          </a:solidFill>
+          <a:ln w="25400">
+            <a:solidFill>
+              <a:srgbClr val="2E86AB"/>
+            </a:solidFill>
+            <a:prstDash val="solid"/>
+          </a:ln>
+        </p:spPr>
+        <p:txBody>
+          <a:bodyPr/>
+          <a:lstStyle/>
+          <a:p>
+            <a:endParaRPr lang="en-TH"/>
+          </a:p>
+        </p:txBody>
+      </p:sp>
+      <p:sp>
+        <p:nvSpPr>
+          <p:cNvPr id="39" name="Text 8">
+            <a:extLst>
+              <a:ext uri="{FF2B5EF4-FFF2-40B4-BE49-F238E27FC236}">
+                <a16:creationId xmlns:a16="http://schemas.microsoft.com/office/drawing/2014/main" id="{D1C69124-998A-80B0-BD99-6F81C7D52F77}"/>
+              </a:ext>
+            </a:extLst>
+          </p:cNvPr>
+          <p:cNvSpPr/>
+          <p:nvPr/>
+        </p:nvSpPr>
+        <p:spPr>
+          <a:xfrm>
+            <a:off x="2286000" y="2174607"/>
+            <a:ext cx="1097280" cy="320040"/>
+          </a:xfrm>
+          <a:prstGeom prst="rect">
+            <a:avLst/>
+          </a:prstGeom>
+          <a:noFill/>
           <a:ln/>
         </p:spPr>
         <p:txBody>
           <a:bodyPr wrap="square" rtlCol="0" anchor="ctr"/>
           <a:lstStyle/>
           <a:p>
-            <a:pPr marL="0" indent="0" algn="r">
-              <a:buNone/>
-            </a:pPr>
-            <a:r>
-              <a:rPr lang="en-US" sz="900" dirty="0">
-                <a:solidFill>
-                  <a:srgbClr val="718096"/>
+            <a:pPr marL="0" indent="0" algn="ctr">
+              <a:buNone/>
+            </a:pPr>
+            <a:r>
+              <a:rPr lang="en-US" sz="1400" b="1" dirty="0">
+                <a:solidFill>
+                  <a:srgbClr val="FFFFFF"/>
                 </a:solidFill>
                 <a:latin typeface="Calibri" pitchFamily="34" charset="0"/>
                 <a:ea typeface="Calibri" pitchFamily="34" charset="-122"/>
                 <a:cs typeface="Calibri" pitchFamily="34" charset="-120"/>
               </a:rPr>
-              <a:t>12 / 21</a:t>
-            </a:r>
-            <a:endParaRPr lang="en-US" sz="900" dirty="0"/>
+              <a:t>S4</a:t>
+            </a:r>
+            <a:endParaRPr lang="en-US" sz="1400" dirty="0"/>
+          </a:p>
+        </p:txBody>
+      </p:sp>
+      <p:sp>
+        <p:nvSpPr>
+          <p:cNvPr id="40" name="Text 9">
+            <a:extLst>
+              <a:ext uri="{FF2B5EF4-FFF2-40B4-BE49-F238E27FC236}">
+                <a16:creationId xmlns:a16="http://schemas.microsoft.com/office/drawing/2014/main" id="{23F425A3-CF58-83E8-E5E6-BC5CBBB1B94F}"/>
+              </a:ext>
+            </a:extLst>
+          </p:cNvPr>
+          <p:cNvSpPr/>
+          <p:nvPr/>
+        </p:nvSpPr>
+        <p:spPr>
+          <a:xfrm>
+            <a:off x="2286000" y="2494647"/>
+            <a:ext cx="1097280" cy="246888"/>
+          </a:xfrm>
+          <a:prstGeom prst="rect">
+            <a:avLst/>
+          </a:prstGeom>
+          <a:noFill/>
+          <a:ln/>
+        </p:spPr>
+        <p:txBody>
+          <a:bodyPr wrap="square" rtlCol="0" anchor="ctr"/>
+          <a:lstStyle/>
+          <a:p>
+            <a:pPr marL="0" indent="0" algn="ctr">
+              <a:buNone/>
+            </a:pPr>
+            <a:r>
+              <a:rPr lang="en-US" sz="850" dirty="0">
+                <a:solidFill>
+                  <a:srgbClr val="CBD5E0"/>
+                </a:solidFill>
+                <a:latin typeface="Calibri" pitchFamily="34" charset="0"/>
+                <a:ea typeface="Calibri" pitchFamily="34" charset="-122"/>
+                <a:cs typeface="Calibri" pitchFamily="34" charset="-120"/>
+              </a:rPr>
+              <a:t>ทำงาน 1 </a:t>
+            </a:r>
+            <a:r>
+              <a:rPr lang="th-TH" sz="850" dirty="0">
+                <a:solidFill>
+                  <a:srgbClr val="CBD5E0"/>
+                </a:solidFill>
+                <a:latin typeface="Calibri" pitchFamily="34" charset="0"/>
+                <a:ea typeface="Calibri" pitchFamily="34" charset="-122"/>
+                <a:cs typeface="Calibri" pitchFamily="34" charset="-120"/>
+              </a:rPr>
+              <a:t>คืน</a:t>
+            </a:r>
+            <a:endParaRPr lang="en-US" sz="850" dirty="0"/>
+          </a:p>
+        </p:txBody>
+      </p:sp>
+      <p:cxnSp>
+        <p:nvCxnSpPr>
+          <p:cNvPr id="42" name="Straight Arrow Connector 41">
+            <a:extLst>
+              <a:ext uri="{FF2B5EF4-FFF2-40B4-BE49-F238E27FC236}">
+                <a16:creationId xmlns:a16="http://schemas.microsoft.com/office/drawing/2014/main" id="{B9EBA3DB-E5CB-3B8E-B4CD-06FB492FE23F}"/>
+              </a:ext>
+            </a:extLst>
+          </p:cNvPr>
+          <p:cNvCxnSpPr/>
+          <p:nvPr/>
+        </p:nvCxnSpPr>
+        <p:spPr>
+          <a:xfrm>
+            <a:off x="1546167" y="1973439"/>
+            <a:ext cx="739833" cy="340614"/>
+          </a:xfrm>
+          <a:prstGeom prst="straightConnector1">
+            <a:avLst/>
+          </a:prstGeom>
+          <a:ln>
+            <a:tailEnd type="triangle"/>
+          </a:ln>
+        </p:spPr>
+        <p:style>
+          <a:lnRef idx="1">
+            <a:schemeClr val="accent1"/>
+          </a:lnRef>
+          <a:fillRef idx="0">
+            <a:schemeClr val="accent1"/>
+          </a:fillRef>
+          <a:effectRef idx="0">
+            <a:schemeClr val="accent1"/>
+          </a:effectRef>
+          <a:fontRef idx="minor">
+            <a:schemeClr val="tx1"/>
+          </a:fontRef>
+        </p:style>
+      </p:cxnSp>
+      <p:sp>
+        <p:nvSpPr>
+          <p:cNvPr id="43" name="TextBox 42">
+            <a:extLst>
+              <a:ext uri="{FF2B5EF4-FFF2-40B4-BE49-F238E27FC236}">
+                <a16:creationId xmlns:a16="http://schemas.microsoft.com/office/drawing/2014/main" id="{9D994629-CC24-B3B7-73B1-CA1BA92FD9B3}"/>
+              </a:ext>
+            </a:extLst>
+          </p:cNvPr>
+          <p:cNvSpPr txBox="1"/>
+          <p:nvPr/>
+        </p:nvSpPr>
+        <p:spPr>
+          <a:xfrm>
+            <a:off x="1591887" y="2040219"/>
+            <a:ext cx="216131" cy="369332"/>
+          </a:xfrm>
+          <a:prstGeom prst="rect">
+            <a:avLst/>
+          </a:prstGeom>
+          <a:noFill/>
+        </p:spPr>
+        <p:txBody>
+          <a:bodyPr wrap="square" rtlCol="0">
+            <a:spAutoFit/>
+          </a:bodyPr>
+          <a:lstStyle/>
+          <a:p>
+            <a:r>
+              <a:rPr lang="en-TH" dirty="0"/>
+              <a:t>N</a:t>
+            </a:r>
+          </a:p>
+        </p:txBody>
+      </p:sp>
+      <p:cxnSp>
+        <p:nvCxnSpPr>
+          <p:cNvPr id="45" name="Straight Arrow Connector 44">
+            <a:extLst>
+              <a:ext uri="{FF2B5EF4-FFF2-40B4-BE49-F238E27FC236}">
+                <a16:creationId xmlns:a16="http://schemas.microsoft.com/office/drawing/2014/main" id="{7C4761FD-D5A1-AA23-82B0-DD44386CC4D6}"/>
+              </a:ext>
+            </a:extLst>
+          </p:cNvPr>
+          <p:cNvCxnSpPr>
+            <a:stCxn id="38" idx="3"/>
+          </p:cNvCxnSpPr>
+          <p:nvPr/>
+        </p:nvCxnSpPr>
+        <p:spPr>
+          <a:xfrm flipV="1">
+            <a:off x="3383280" y="1973439"/>
+            <a:ext cx="640080" cy="484632"/>
+          </a:xfrm>
+          <a:prstGeom prst="straightConnector1">
+            <a:avLst/>
+          </a:prstGeom>
+          <a:ln>
+            <a:tailEnd type="triangle"/>
+          </a:ln>
+        </p:spPr>
+        <p:style>
+          <a:lnRef idx="1">
+            <a:schemeClr val="accent1"/>
+          </a:lnRef>
+          <a:fillRef idx="0">
+            <a:schemeClr val="accent1"/>
+          </a:fillRef>
+          <a:effectRef idx="0">
+            <a:schemeClr val="accent1"/>
+          </a:effectRef>
+          <a:fontRef idx="minor">
+            <a:schemeClr val="tx1"/>
+          </a:fontRef>
+        </p:style>
+      </p:cxnSp>
+      <p:sp>
+        <p:nvSpPr>
+          <p:cNvPr id="46" name="TextBox 45">
+            <a:extLst>
+              <a:ext uri="{FF2B5EF4-FFF2-40B4-BE49-F238E27FC236}">
+                <a16:creationId xmlns:a16="http://schemas.microsoft.com/office/drawing/2014/main" id="{8020A057-F22D-B35F-DE7A-07A18EF0A48D}"/>
+              </a:ext>
+            </a:extLst>
+          </p:cNvPr>
+          <p:cNvSpPr txBox="1"/>
+          <p:nvPr/>
+        </p:nvSpPr>
+        <p:spPr>
+          <a:xfrm>
+            <a:off x="3674225" y="1799304"/>
+            <a:ext cx="216131" cy="369332"/>
+          </a:xfrm>
+          <a:prstGeom prst="rect">
+            <a:avLst/>
+          </a:prstGeom>
+          <a:noFill/>
+        </p:spPr>
+        <p:txBody>
+          <a:bodyPr wrap="square" rtlCol="0">
+            <a:spAutoFit/>
+          </a:bodyPr>
+          <a:lstStyle/>
+          <a:p>
+            <a:r>
+              <a:rPr lang="en-TH" dirty="0"/>
+              <a:t>D</a:t>
+            </a:r>
+          </a:p>
+        </p:txBody>
+      </p:sp>
+      <p:cxnSp>
+        <p:nvCxnSpPr>
+          <p:cNvPr id="47" name="Straight Arrow Connector 46">
+            <a:extLst>
+              <a:ext uri="{FF2B5EF4-FFF2-40B4-BE49-F238E27FC236}">
+                <a16:creationId xmlns:a16="http://schemas.microsoft.com/office/drawing/2014/main" id="{63ED1BB1-47F6-AE57-6702-31AA42420A68}"/>
+              </a:ext>
+            </a:extLst>
+          </p:cNvPr>
+          <p:cNvCxnSpPr/>
+          <p:nvPr/>
+        </p:nvCxnSpPr>
+        <p:spPr>
+          <a:xfrm>
+            <a:off x="3304309" y="1993638"/>
+            <a:ext cx="739833" cy="340614"/>
+          </a:xfrm>
+          <a:prstGeom prst="straightConnector1">
+            <a:avLst/>
+          </a:prstGeom>
+          <a:ln>
+            <a:tailEnd type="triangle"/>
+          </a:ln>
+        </p:spPr>
+        <p:style>
+          <a:lnRef idx="1">
+            <a:schemeClr val="accent1"/>
+          </a:lnRef>
+          <a:fillRef idx="0">
+            <a:schemeClr val="accent1"/>
+          </a:fillRef>
+          <a:effectRef idx="0">
+            <a:schemeClr val="accent1"/>
+          </a:effectRef>
+          <a:fontRef idx="minor">
+            <a:schemeClr val="tx1"/>
+          </a:fontRef>
+        </p:style>
+      </p:cxnSp>
+      <p:sp>
+        <p:nvSpPr>
+          <p:cNvPr id="48" name="TextBox 47">
+            <a:extLst>
+              <a:ext uri="{FF2B5EF4-FFF2-40B4-BE49-F238E27FC236}">
+                <a16:creationId xmlns:a16="http://schemas.microsoft.com/office/drawing/2014/main" id="{5A79F552-79B4-6157-6200-C998BA4212BF}"/>
+              </a:ext>
+            </a:extLst>
+          </p:cNvPr>
+          <p:cNvSpPr txBox="1"/>
+          <p:nvPr/>
+        </p:nvSpPr>
+        <p:spPr>
+          <a:xfrm>
+            <a:off x="3709555" y="2209409"/>
+            <a:ext cx="216131" cy="369332"/>
+          </a:xfrm>
+          <a:prstGeom prst="rect">
+            <a:avLst/>
+          </a:prstGeom>
+          <a:noFill/>
+        </p:spPr>
+        <p:txBody>
+          <a:bodyPr wrap="square" rtlCol="0">
+            <a:spAutoFit/>
+          </a:bodyPr>
+          <a:lstStyle/>
+          <a:p>
+            <a:r>
+              <a:rPr lang="en-TH" dirty="0"/>
+              <a:t>N</a:t>
+            </a:r>
+          </a:p>
+        </p:txBody>
+      </p:sp>
+      <p:cxnSp>
+        <p:nvCxnSpPr>
+          <p:cNvPr id="49" name="Straight Arrow Connector 48">
+            <a:extLst>
+              <a:ext uri="{FF2B5EF4-FFF2-40B4-BE49-F238E27FC236}">
+                <a16:creationId xmlns:a16="http://schemas.microsoft.com/office/drawing/2014/main" id="{6EE1BB2C-9C7F-3E1A-3B8F-7599ADCD63C2}"/>
+              </a:ext>
+            </a:extLst>
+          </p:cNvPr>
+          <p:cNvCxnSpPr/>
+          <p:nvPr/>
+        </p:nvCxnSpPr>
+        <p:spPr>
+          <a:xfrm flipV="1">
+            <a:off x="5131031" y="1991725"/>
+            <a:ext cx="640080" cy="484632"/>
+          </a:xfrm>
+          <a:prstGeom prst="straightConnector1">
+            <a:avLst/>
+          </a:prstGeom>
+          <a:ln>
+            <a:tailEnd type="triangle"/>
+          </a:ln>
+        </p:spPr>
+        <p:style>
+          <a:lnRef idx="1">
+            <a:schemeClr val="accent1"/>
+          </a:lnRef>
+          <a:fillRef idx="0">
+            <a:schemeClr val="accent1"/>
+          </a:fillRef>
+          <a:effectRef idx="0">
+            <a:schemeClr val="accent1"/>
+          </a:effectRef>
+          <a:fontRef idx="minor">
+            <a:schemeClr val="tx1"/>
+          </a:fontRef>
+        </p:style>
+      </p:cxnSp>
+      <p:sp>
+        <p:nvSpPr>
+          <p:cNvPr id="50" name="TextBox 49">
+            <a:extLst>
+              <a:ext uri="{FF2B5EF4-FFF2-40B4-BE49-F238E27FC236}">
+                <a16:creationId xmlns:a16="http://schemas.microsoft.com/office/drawing/2014/main" id="{347EF28C-CE4C-337B-2F7D-6481D1B0B27E}"/>
+              </a:ext>
+            </a:extLst>
+          </p:cNvPr>
+          <p:cNvSpPr txBox="1"/>
+          <p:nvPr/>
+        </p:nvSpPr>
+        <p:spPr>
+          <a:xfrm>
+            <a:off x="5465617" y="1808967"/>
+            <a:ext cx="216131" cy="369332"/>
+          </a:xfrm>
+          <a:prstGeom prst="rect">
+            <a:avLst/>
+          </a:prstGeom>
+          <a:noFill/>
+        </p:spPr>
+        <p:txBody>
+          <a:bodyPr wrap="square" rtlCol="0">
+            <a:spAutoFit/>
+          </a:bodyPr>
+          <a:lstStyle/>
+          <a:p>
+            <a:r>
+              <a:rPr lang="en-TH" dirty="0"/>
+              <a:t>D</a:t>
+            </a:r>
+          </a:p>
+        </p:txBody>
+      </p:sp>
+      <p:cxnSp>
+        <p:nvCxnSpPr>
+          <p:cNvPr id="51" name="Straight Arrow Connector 50">
+            <a:extLst>
+              <a:ext uri="{FF2B5EF4-FFF2-40B4-BE49-F238E27FC236}">
+                <a16:creationId xmlns:a16="http://schemas.microsoft.com/office/drawing/2014/main" id="{991EA49E-9407-C844-C5C5-F97A26191B3B}"/>
+              </a:ext>
+            </a:extLst>
+          </p:cNvPr>
+          <p:cNvCxnSpPr/>
+          <p:nvPr/>
+        </p:nvCxnSpPr>
+        <p:spPr>
+          <a:xfrm>
+            <a:off x="5064529" y="1970412"/>
+            <a:ext cx="739833" cy="340614"/>
+          </a:xfrm>
+          <a:prstGeom prst="straightConnector1">
+            <a:avLst/>
+          </a:prstGeom>
+          <a:ln>
+            <a:tailEnd type="triangle"/>
+          </a:ln>
+        </p:spPr>
+        <p:style>
+          <a:lnRef idx="1">
+            <a:schemeClr val="accent1"/>
+          </a:lnRef>
+          <a:fillRef idx="0">
+            <a:schemeClr val="accent1"/>
+          </a:fillRef>
+          <a:effectRef idx="0">
+            <a:schemeClr val="accent1"/>
+          </a:effectRef>
+          <a:fontRef idx="minor">
+            <a:schemeClr val="tx1"/>
+          </a:fontRef>
+        </p:style>
+      </p:cxnSp>
+      <p:sp>
+        <p:nvSpPr>
+          <p:cNvPr id="52" name="TextBox 51">
+            <a:extLst>
+              <a:ext uri="{FF2B5EF4-FFF2-40B4-BE49-F238E27FC236}">
+                <a16:creationId xmlns:a16="http://schemas.microsoft.com/office/drawing/2014/main" id="{A3720E75-D3FF-CFF7-F0B4-BBE99EE39106}"/>
+              </a:ext>
+            </a:extLst>
+          </p:cNvPr>
+          <p:cNvSpPr txBox="1"/>
+          <p:nvPr/>
+        </p:nvSpPr>
+        <p:spPr>
+          <a:xfrm>
+            <a:off x="5500947" y="2219072"/>
+            <a:ext cx="216131" cy="369332"/>
+          </a:xfrm>
+          <a:prstGeom prst="rect">
+            <a:avLst/>
+          </a:prstGeom>
+          <a:noFill/>
+        </p:spPr>
+        <p:txBody>
+          <a:bodyPr wrap="square" rtlCol="0">
+            <a:spAutoFit/>
+          </a:bodyPr>
+          <a:lstStyle/>
+          <a:p>
+            <a:r>
+              <a:rPr lang="en-TH" dirty="0"/>
+              <a:t>N</a:t>
+            </a:r>
           </a:p>
         </p:txBody>
       </p:sp>
@@ -8376,9 +9637,6 @@
             </a:endParaRPr>
           </a:p>
           <a:p>
-            <a:pPr marL="0" indent="0">
-              <a:buNone/>
-            </a:pPr>
             <a:r>
               <a:rPr lang="en-US" sz="1050" dirty="0">
                 <a:solidFill>
@@ -8388,14 +9646,100 @@
                 <a:ea typeface="Consolas" pitchFamily="34" charset="-122"/>
                 <a:cs typeface="Consolas" pitchFamily="34" charset="-120"/>
               </a:rPr>
-              <a:t>   | S1:  S2, S3, S1  | S2:  S4, S4, S1  | S3:  S4, S5, S1</a:t>
+              <a:t>   | S0:  S1, S4, S0  </a:t>
+            </a:r>
+          </a:p>
+          <a:p>
+            <a:pPr marL="0" indent="0">
+              <a:buNone/>
+            </a:pPr>
+            <a:r>
+              <a:rPr lang="en-US" sz="1050" dirty="0">
+                <a:solidFill>
+                  <a:srgbClr val="E8EDF2"/>
+                </a:solidFill>
+                <a:latin typeface="Consolas" pitchFamily="34" charset="0"/>
+                <a:ea typeface="Consolas" pitchFamily="34" charset="-122"/>
+                <a:cs typeface="Consolas" pitchFamily="34" charset="-120"/>
+              </a:rPr>
+              <a:t>   | S1:  S2, S5, S0  </a:t>
+            </a:r>
+          </a:p>
+          <a:p>
+            <a:pPr marL="0" indent="0">
+              <a:buNone/>
+            </a:pPr>
+            <a:r>
+              <a:rPr lang="en-US" sz="1050" dirty="0">
+                <a:solidFill>
+                  <a:srgbClr val="E8EDF2"/>
+                </a:solidFill>
+                <a:latin typeface="Consolas" pitchFamily="34" charset="0"/>
+                <a:ea typeface="Consolas" pitchFamily="34" charset="-122"/>
+                <a:cs typeface="Consolas" pitchFamily="34" charset="-120"/>
+              </a:rPr>
+              <a:t>   | S2:  S3, S6, S0  </a:t>
+            </a:r>
+          </a:p>
+          <a:p>
+            <a:r>
+              <a:rPr lang="en-US" sz="1050" dirty="0">
+                <a:solidFill>
+                  <a:srgbClr val="E8EDF2"/>
+                </a:solidFill>
+                <a:latin typeface="Consolas" pitchFamily="34" charset="0"/>
+                <a:ea typeface="Consolas" pitchFamily="34" charset="-122"/>
+                <a:cs typeface="Consolas" pitchFamily="34" charset="-120"/>
+              </a:rPr>
+              <a:t>   | S3:  </a:t>
+            </a:r>
+            <a:r>
+              <a:rPr lang="en-US" sz="1050" dirty="0">
+                <a:solidFill>
+                  <a:srgbClr val="CC6666"/>
+                </a:solidFill>
+                <a:latin typeface="Consolas" pitchFamily="34" charset="0"/>
+                <a:ea typeface="Consolas" pitchFamily="34" charset="-122"/>
+                <a:cs typeface="Consolas" pitchFamily="34" charset="-120"/>
+              </a:rPr>
+              <a:t>&lt;&gt;</a:t>
+            </a:r>
+            <a:r>
+              <a:rPr lang="en-US" sz="1050" dirty="0">
+                <a:solidFill>
+                  <a:srgbClr val="E8EDF2"/>
+                </a:solidFill>
+                <a:latin typeface="Consolas" pitchFamily="34" charset="0"/>
+                <a:ea typeface="Consolas" pitchFamily="34" charset="-122"/>
+                <a:cs typeface="Consolas" pitchFamily="34" charset="-120"/>
+              </a:rPr>
+              <a:t>, </a:t>
+            </a:r>
+            <a:r>
+              <a:rPr lang="en-US" sz="1050" dirty="0">
+                <a:solidFill>
+                  <a:srgbClr val="CC6666"/>
+                </a:solidFill>
+                <a:latin typeface="Consolas" pitchFamily="34" charset="0"/>
+                <a:ea typeface="Consolas" pitchFamily="34" charset="-122"/>
+                <a:cs typeface="Consolas" pitchFamily="34" charset="-120"/>
+              </a:rPr>
+              <a:t>&lt;&gt;</a:t>
+            </a:r>
+            <a:r>
+              <a:rPr lang="en-US" sz="1050" dirty="0">
+                <a:solidFill>
+                  <a:srgbClr val="E8EDF2"/>
+                </a:solidFill>
+                <a:latin typeface="Consolas" pitchFamily="34" charset="0"/>
+                <a:ea typeface="Consolas" pitchFamily="34" charset="-122"/>
+                <a:cs typeface="Consolas" pitchFamily="34" charset="-120"/>
+              </a:rPr>
+              <a:t>, S0</a:t>
             </a:r>
             <a:endParaRPr lang="en-US" sz="1050" dirty="0"/>
           </a:p>
           <a:p>
-            <a:pPr marL="0" indent="0">
-              <a:buNone/>
-            </a:pPr>
             <a:r>
               <a:rPr lang="en-US" sz="1050" dirty="0">
                 <a:solidFill>
@@ -8405,7 +9749,29 @@
                 <a:ea typeface="Consolas" pitchFamily="34" charset="-122"/>
                 <a:cs typeface="Consolas" pitchFamily="34" charset="-120"/>
               </a:rPr>
-              <a:t>   | S4:  S6, S6, S1</a:t>
+              <a:t>   | S4:  S2, </a:t>
+            </a:r>
+            <a:r>
+              <a:rPr lang="en-US" sz="1050" dirty="0">
+                <a:solidFill>
+                  <a:srgbClr val="CC6666"/>
+                </a:solidFill>
+                <a:latin typeface="Consolas" pitchFamily="34" charset="0"/>
+                <a:ea typeface="Consolas" pitchFamily="34" charset="-122"/>
+                <a:cs typeface="Consolas" pitchFamily="34" charset="-120"/>
+              </a:rPr>
+              <a:t>&lt;&gt;</a:t>
+            </a:r>
+            <a:r>
+              <a:rPr lang="en-US" sz="1050" dirty="0">
+                <a:solidFill>
+                  <a:srgbClr val="E8EDF2"/>
+                </a:solidFill>
+                <a:latin typeface="Consolas" pitchFamily="34" charset="0"/>
+                <a:ea typeface="Consolas" pitchFamily="34" charset="-122"/>
+                <a:cs typeface="Consolas" pitchFamily="34" charset="-120"/>
+              </a:rPr>
+              <a:t>, S0</a:t>
             </a:r>
             <a:endParaRPr lang="en-US" sz="1050" dirty="0"/>
           </a:p>
@@ -8422,7 +9788,7 @@
                 <a:ea typeface="Consolas" pitchFamily="34" charset="-122"/>
                 <a:cs typeface="Consolas" pitchFamily="34" charset="-120"/>
               </a:rPr>
-              <a:t>   | S5:  S6, </a:t>
+              <a:t>   | S5:  S3, </a:t>
             </a:r>
             <a:r>
               <a:rPr lang="en-US" sz="1050" dirty="0">
@@ -8444,112 +9810,89 @@
                 <a:ea typeface="Consolas" pitchFamily="34" charset="-122"/>
                 <a:cs typeface="Consolas" pitchFamily="34" charset="-120"/>
               </a:rPr>
-              <a:t>, S1   </a:t>
-            </a:r>
+              <a:t>, S0 </a:t>
+            </a:r>
+          </a:p>
+          <a:p>
+            <a:pPr marL="0" indent="0">
+              <a:buNone/>
+            </a:pPr>
             <a:r>
               <a:rPr lang="en-US" sz="1050" dirty="0">
                 <a:solidFill>
+                  <a:schemeClr val="bg1"/>
+                </a:solidFill>
+                <a:latin typeface="Consolas" pitchFamily="34" charset="0"/>
+                <a:ea typeface="Consolas" pitchFamily="34" charset="-122"/>
+                <a:cs typeface="Consolas" pitchFamily="34" charset="-120"/>
+              </a:rPr>
+              <a:t>   </a:t>
+            </a:r>
+            <a:r>
+              <a:rPr lang="en-US" sz="1050" dirty="0">
+                <a:solidFill>
+                  <a:srgbClr val="E8EDF2"/>
+                </a:solidFill>
+                <a:latin typeface="Consolas" pitchFamily="34" charset="0"/>
+                <a:ea typeface="Consolas" pitchFamily="34" charset="-122"/>
+                <a:cs typeface="Consolas" pitchFamily="34" charset="-120"/>
+              </a:rPr>
+              <a:t>| S6:  </a:t>
+            </a:r>
+            <a:r>
+              <a:rPr lang="en-US" sz="1050" dirty="0">
+                <a:solidFill>
+                  <a:srgbClr val="CC6666"/>
+                </a:solidFill>
+                <a:latin typeface="Consolas" pitchFamily="34" charset="0"/>
+                <a:ea typeface="Consolas" pitchFamily="34" charset="-122"/>
+                <a:cs typeface="Consolas" pitchFamily="34" charset="-120"/>
+              </a:rPr>
+              <a:t>&lt;&gt;</a:t>
+            </a:r>
+            <a:r>
+              <a:rPr lang="en-US" sz="1050" dirty="0">
+                <a:solidFill>
+                  <a:srgbClr val="E8EDF2"/>
+                </a:solidFill>
+                <a:latin typeface="Consolas" pitchFamily="34" charset="0"/>
+                <a:ea typeface="Consolas" pitchFamily="34" charset="-122"/>
+                <a:cs typeface="Consolas" pitchFamily="34" charset="-120"/>
+              </a:rPr>
+              <a:t>, </a:t>
+            </a:r>
+            <a:r>
+              <a:rPr lang="en-US" sz="1050" dirty="0">
+                <a:solidFill>
+                  <a:srgbClr val="CC6666"/>
+                </a:solidFill>
+                <a:latin typeface="Consolas" pitchFamily="34" charset="0"/>
+                <a:ea typeface="Consolas" pitchFamily="34" charset="-122"/>
+                <a:cs typeface="Consolas" pitchFamily="34" charset="-120"/>
+              </a:rPr>
+              <a:t>&lt;&gt;</a:t>
+            </a:r>
+            <a:r>
+              <a:rPr lang="en-US" sz="1050" dirty="0">
+                <a:solidFill>
+                  <a:schemeClr val="bg1"/>
+                </a:solidFill>
+                <a:latin typeface="Consolas" pitchFamily="34" charset="0"/>
+                <a:ea typeface="Consolas" pitchFamily="34" charset="-122"/>
+                <a:cs typeface="Consolas" pitchFamily="34" charset="-120"/>
+              </a:rPr>
+              <a:t>, S0 |];</a:t>
+            </a:r>
+            <a:r>
+              <a:rPr lang="en-US" sz="1050" dirty="0">
+                <a:solidFill>
                   <a:srgbClr val="718096"/>
                 </a:solidFill>
                 <a:latin typeface="Consolas" pitchFamily="34" charset="0"/>
                 <a:ea typeface="Consolas" pitchFamily="34" charset="-122"/>
                 <a:cs typeface="Consolas" pitchFamily="34" charset="-120"/>
               </a:rPr>
-              <a:t>% ห้ามดึก 3 </a:t>
-            </a:r>
-            <a:r>
-              <a:rPr lang="en-US" sz="1050" dirty="0" err="1">
-                <a:solidFill>
-                  <a:srgbClr val="718096"/>
-                </a:solidFill>
-                <a:latin typeface="Consolas" pitchFamily="34" charset="0"/>
-                <a:ea typeface="Consolas" pitchFamily="34" charset="-122"/>
-                <a:cs typeface="Consolas" pitchFamily="34" charset="-120"/>
-              </a:rPr>
-              <a:t>คืนติดต่อกัน</a:t>
-            </a:r>
-            <a:r>
-              <a:rPr lang="en-US" sz="1050" dirty="0">
-                <a:solidFill>
-                  <a:srgbClr val="718096"/>
-                </a:solidFill>
-                <a:latin typeface="Consolas" pitchFamily="34" charset="0"/>
-                <a:ea typeface="Consolas" pitchFamily="34" charset="-122"/>
-                <a:cs typeface="Consolas" pitchFamily="34" charset="-120"/>
-              </a:rPr>
-              <a:t>!</a:t>
-            </a:r>
-            <a:endParaRPr lang="en-US" sz="1050" dirty="0"/>
-          </a:p>
-          <a:p>
-            <a:pPr marL="0" indent="0">
-              <a:buNone/>
-            </a:pPr>
-            <a:r>
-              <a:rPr lang="en-US" sz="1050" dirty="0">
-                <a:solidFill>
-                  <a:srgbClr val="E8EDF2"/>
-                </a:solidFill>
-                <a:latin typeface="Consolas" pitchFamily="34" charset="0"/>
-                <a:ea typeface="Consolas" pitchFamily="34" charset="-122"/>
-                <a:cs typeface="Consolas" pitchFamily="34" charset="-120"/>
-              </a:rPr>
-              <a:t>   | S6:  </a:t>
-            </a:r>
-            <a:r>
-              <a:rPr lang="en-US" sz="1050" dirty="0">
-                <a:solidFill>
-                  <a:srgbClr val="CC6666"/>
-                </a:solidFill>
-                <a:latin typeface="Consolas" pitchFamily="34" charset="0"/>
-                <a:ea typeface="Consolas" pitchFamily="34" charset="-122"/>
-                <a:cs typeface="Consolas" pitchFamily="34" charset="-120"/>
-              </a:rPr>
-              <a:t>&lt;&gt;</a:t>
-            </a:r>
-            <a:r>
-              <a:rPr lang="en-US" sz="1050" dirty="0">
-                <a:solidFill>
-                  <a:srgbClr val="E8EDF2"/>
-                </a:solidFill>
-                <a:latin typeface="Consolas" pitchFamily="34" charset="0"/>
-                <a:ea typeface="Consolas" pitchFamily="34" charset="-122"/>
-                <a:cs typeface="Consolas" pitchFamily="34" charset="-120"/>
-              </a:rPr>
-              <a:t>, </a:t>
-            </a:r>
-            <a:r>
-              <a:rPr lang="en-US" sz="1050" dirty="0">
-                <a:solidFill>
-                  <a:srgbClr val="CC6666"/>
-                </a:solidFill>
-                <a:latin typeface="Consolas" pitchFamily="34" charset="0"/>
-                <a:ea typeface="Consolas" pitchFamily="34" charset="-122"/>
-                <a:cs typeface="Consolas" pitchFamily="34" charset="-120"/>
-              </a:rPr>
-              <a:t>&lt;&gt;</a:t>
-            </a:r>
-            <a:r>
-              <a:rPr lang="en-US" sz="1050" dirty="0">
-                <a:solidFill>
-                  <a:schemeClr val="bg1"/>
-                </a:solidFill>
-                <a:latin typeface="Consolas" pitchFamily="34" charset="0"/>
-                <a:ea typeface="Consolas" pitchFamily="34" charset="-122"/>
-                <a:cs typeface="Consolas" pitchFamily="34" charset="-120"/>
-              </a:rPr>
-              <a:t>, S1 |];</a:t>
-            </a:r>
-            <a:r>
-              <a:rPr lang="en-US" sz="1050" dirty="0">
-                <a:solidFill>
-                  <a:srgbClr val="718096"/>
-                </a:solidFill>
-                <a:latin typeface="Consolas" pitchFamily="34" charset="0"/>
-                <a:ea typeface="Consolas" pitchFamily="34" charset="-122"/>
-                <a:cs typeface="Consolas" pitchFamily="34" charset="-120"/>
-              </a:rPr>
-              <a:t> % ต้องหยุดก่อน</a:t>
+              <a:t> </a:t>
             </a:r>
             <a:r>
               <a:rPr lang="en-US" sz="1050" dirty="0">

--- a/day4/Day4_MiniZinc_Slides .pptx
+++ b/day4/Day4_MiniZinc_Slides .pptx
@@ -10383,16 +10383,10 @@
                 <a:ea typeface="Calibri" pitchFamily="34" charset="-122"/>
                 <a:cs typeface="Calibri" pitchFamily="34" charset="-120"/>
               </a:rPr>
-              <a:t>โจทย์: พนักงาน 10 คน, 14 วัน — กะ M/E/N/O</a:t>
-            </a:r>
-            <a:endParaRPr lang="en-US" sz="1200" dirty="0"/>
-          </a:p>
-          <a:p>
-            <a:pPr marL="0" indent="0">
-              <a:buNone/>
-            </a:pPr>
-            <a:r>
-              <a:rPr lang="en-US" sz="1200" dirty="0">
+              <a:t>โจทย์: </a:t>
+            </a:r>
+            <a:r>
+              <a:rPr lang="en-US" sz="1200" dirty="0" err="1">
                 <a:solidFill>
                   <a:srgbClr val="2D3748"/>
                 </a:solidFill>
@@ -10400,7 +10394,35 @@
                 <a:ea typeface="Calibri" pitchFamily="34" charset="-122"/>
                 <a:cs typeface="Calibri" pitchFamily="34" charset="-120"/>
               </a:rPr>
-              <a:t>Demand: เช้า≥4, บ่าย≥3, ดึก≥2  |  Minimize กะดึกรวม</a:t>
+              <a:t>พนักงาน</a:t>
+            </a:r>
+            <a:r>
+              <a:rPr lang="en-US" sz="1200" dirty="0">
+                <a:solidFill>
+                  <a:srgbClr val="2D3748"/>
+                </a:solidFill>
+                <a:latin typeface="Calibri" pitchFamily="34" charset="0"/>
+                <a:ea typeface="Calibri" pitchFamily="34" charset="-122"/>
+                <a:cs typeface="Calibri" pitchFamily="34" charset="-120"/>
+              </a:rPr>
+              <a:t> 8 คน, 7 วัน — กะ M/E/N/O</a:t>
+            </a:r>
+            <a:endParaRPr lang="en-US" sz="1200" dirty="0"/>
+          </a:p>
+          <a:p>
+            <a:pPr marL="0" indent="0">
+              <a:buNone/>
+            </a:pPr>
+            <a:r>
+              <a:rPr lang="en-US" sz="1200" dirty="0">
+                <a:solidFill>
+                  <a:srgbClr val="2D3748"/>
+                </a:solidFill>
+                <a:latin typeface="Calibri" pitchFamily="34" charset="0"/>
+                <a:ea typeface="Calibri" pitchFamily="34" charset="-122"/>
+                <a:cs typeface="Calibri" pitchFamily="34" charset="-120"/>
+              </a:rPr>
+              <a:t>Demand: เช้า≥3, บ่าย≥2, ดึก≥1  |  Minimize กะดึกรวม</a:t>
             </a:r>
             <a:endParaRPr lang="en-US" sz="1200" dirty="0"/>
           </a:p>
